--- a/Présentation.pptx
+++ b/Présentation.pptx
@@ -3888,7 +3888,7 @@
       </p:grpSpPr>
       <p:sp>
         <p:nvSpPr>
-          <p:cNvPr id="54" name="PlaceHolder 1"/>
+          <p:cNvPr id="52" name="PlaceHolder 1"/>
           <p:cNvSpPr>
             <a:spLocks noGrp="1"/>
           </p:cNvSpPr>
@@ -3898,8 +3898,8 @@
         </p:nvSpPr>
         <p:spPr>
           <a:xfrm>
-            <a:off x="2846520" y="304920"/>
-            <a:ext cx="6498360" cy="628920"/>
+            <a:off x="3025800" y="304920"/>
+            <a:ext cx="6139800" cy="628920"/>
           </a:xfrm>
           <a:prstGeom prst="rect">
             <a:avLst/>
@@ -3945,6 +3945,313 @@
               <a:uFillTx/>
               <a:latin typeface="Calibri"/>
             </a:endParaRPr>
+          </a:p>
+        </p:txBody>
+      </p:sp>
+      <p:sp>
+        <p:nvSpPr>
+          <p:cNvPr id="53" name="ZoneTexte 53"/>
+          <p:cNvSpPr/>
+          <p:nvPr/>
+        </p:nvSpPr>
+        <p:spPr>
+          <a:xfrm>
+            <a:off x="609480" y="1400000"/>
+            <a:ext cx="10900000" cy="2600000"/>
+          </a:xfrm>
+          <a:prstGeom prst="rect">
+            <a:avLst/>
+          </a:prstGeom>
+          <a:noFill/>
+          <a:ln w="0">
+            <a:noFill/>
+          </a:ln>
+        </p:spPr>
+        <p:style>
+          <a:lnRef idx="0"/>
+          <a:fillRef idx="0"/>
+          <a:effectRef idx="0"/>
+          <a:fontRef idx="minor"/>
+        </p:style>
+        <p:txBody>
+          <a:bodyPr lIns="90000" tIns="45000" rIns="90000" bIns="45000" anchor="t">
+            <a:spAutoFit/>
+          </a:bodyPr>
+          <a:p>
+            <a:pPr marL="285840" indent="-285840">
+              <a:lnSpc>
+                <a:spcPct val="100000"/>
+              </a:lnSpc>
+              <a:buClr>
+                <a:srgbClr val="FFFFFF"/>
+              </a:buClr>
+              <a:buFont typeface="OpenSymbol"/>
+              <a:buChar char="-"/>
+            </a:pPr>
+            <a:r>
+              <a:rPr lang="fr-FR" sz="1500" b="1" u="none" strike="noStrike">
+                <a:solidFill>
+                  <a:schemeClr val="lt1"/>
+                </a:solidFill>
+                <a:effectLst/>
+                <a:uFillTx/>
+                <a:latin typeface="Arial"/>
+              </a:rPr>
+              <a:t>Source : </a:t>
+            </a:r>
+            <a:r>
+              <a:rPr lang="fr-FR" sz="1500" b="0" u="none" strike="noStrike">
+                <a:solidFill>
+                  <a:schemeClr val="lt1"/>
+                </a:solidFill>
+                <a:effectLst/>
+                <a:uFillTx/>
+                <a:latin typeface="Arial"/>
+              </a:rPr>
+              <a:t>ruche de registre SYSTEM, clé ControlSet001\Enum\USBSTOR, lue avec Registry Explorer v2026.5.0</a:t>
+            </a:r>
+            <a:endParaRPr lang="en-GB" sz="1500" b="0" u="none" strike="noStrike">
+              <a:solidFill>
+                <a:srgbClr val="000000"/>
+              </a:solidFill>
+              <a:effectLst/>
+              <a:uFillTx/>
+              <a:latin typeface="Arial"/>
+            </a:endParaRPr>
+          </a:p>
+          <a:p>
+            <a:pPr>
+              <a:lnSpc>
+                <a:spcPct val="100000"/>
+              </a:lnSpc>
+            </a:pPr>
+            <a:endParaRPr lang="en-GB" sz="1500" b="0" u="none" strike="noStrike">
+              <a:solidFill>
+                <a:srgbClr val="000000"/>
+              </a:solidFill>
+              <a:effectLst/>
+              <a:uFillTx/>
+              <a:latin typeface="Arial"/>
+            </a:endParaRPr>
+          </a:p>
+          <a:p>
+            <a:pPr marL="285840" indent="-285840">
+              <a:lnSpc>
+                <a:spcPct val="100000"/>
+              </a:lnSpc>
+              <a:buClr>
+                <a:srgbClr val="FFFFFF"/>
+              </a:buClr>
+              <a:buFont typeface="OpenSymbol"/>
+              <a:buChar char="-"/>
+            </a:pPr>
+            <a:r>
+              <a:rPr lang="fr-FR" sz="1500" b="1" u="none" strike="noStrike">
+                <a:solidFill>
+                  <a:schemeClr val="lt1"/>
+                </a:solidFill>
+                <a:effectLst/>
+                <a:uFillTx/>
+                <a:latin typeface="Arial"/>
+              </a:rPr>
+              <a:t>Périphérique identifié : </a:t>
+            </a:r>
+            <a:r>
+              <a:rPr lang="fr-FR" sz="1500" b="0" u="none" strike="noStrike">
+                <a:solidFill>
+                  <a:schemeClr val="lt1"/>
+                </a:solidFill>
+                <a:effectLst/>
+                <a:uFillTx/>
+                <a:latin typeface="Arial"/>
+              </a:rPr>
+              <a:t>SanDisk Cruzer Blade USB Device (Ven_SanDisk, Prod_Cruzer_Blade, Rev_1.00)</a:t>
+            </a:r>
+            <a:endParaRPr lang="en-GB" sz="1500" b="0" u="none" strike="noStrike">
+              <a:solidFill>
+                <a:srgbClr val="000000"/>
+              </a:solidFill>
+              <a:effectLst/>
+              <a:uFillTx/>
+              <a:latin typeface="Arial"/>
+            </a:endParaRPr>
+          </a:p>
+          <a:p>
+            <a:pPr>
+              <a:lnSpc>
+                <a:spcPct val="100000"/>
+              </a:lnSpc>
+            </a:pPr>
+            <a:endParaRPr lang="en-GB" sz="1500" b="0" u="none" strike="noStrike">
+              <a:solidFill>
+                <a:srgbClr val="000000"/>
+              </a:solidFill>
+              <a:effectLst/>
+              <a:uFillTx/>
+              <a:latin typeface="Arial"/>
+            </a:endParaRPr>
+          </a:p>
+          <a:p>
+            <a:pPr marL="285840" indent="-285840">
+              <a:lnSpc>
+                <a:spcPct val="100000"/>
+              </a:lnSpc>
+              <a:buClr>
+                <a:srgbClr val="FFFFFF"/>
+              </a:buClr>
+              <a:buFont typeface="OpenSymbol"/>
+              <a:buChar char="-"/>
+            </a:pPr>
+            <a:r>
+              <a:rPr lang="fr-FR" sz="1500" b="1" u="none" strike="noStrike">
+                <a:solidFill>
+                  <a:schemeClr val="lt1"/>
+                </a:solidFill>
+                <a:effectLst/>
+                <a:uFillTx/>
+                <a:latin typeface="Arial"/>
+              </a:rPr>
+              <a:t>Numéro de série unique (UID) : </a:t>
+            </a:r>
+            <a:r>
+              <a:rPr lang="fr-FR" sz="1500" b="0" u="none" strike="noStrike">
+                <a:solidFill>
+                  <a:schemeClr val="lt1"/>
+                </a:solidFill>
+                <a:effectLst/>
+                <a:uFillTx/>
+                <a:latin typeface="Arial"/>
+              </a:rPr>
+              <a:t>4C530000281008116284&amp;0</a:t>
+            </a:r>
+            <a:endParaRPr lang="en-GB" sz="1500" b="0" u="none" strike="noStrike">
+              <a:solidFill>
+                <a:srgbClr val="000000"/>
+              </a:solidFill>
+              <a:effectLst/>
+              <a:uFillTx/>
+              <a:latin typeface="Arial"/>
+            </a:endParaRPr>
+          </a:p>
+          <a:p>
+            <a:pPr>
+              <a:lnSpc>
+                <a:spcPct val="100000"/>
+              </a:lnSpc>
+            </a:pPr>
+            <a:endParaRPr lang="en-GB" sz="1500" b="0" u="none" strike="noStrike">
+              <a:solidFill>
+                <a:srgbClr val="000000"/>
+              </a:solidFill>
+              <a:effectLst/>
+              <a:uFillTx/>
+              <a:latin typeface="Arial"/>
+            </a:endParaRPr>
+          </a:p>
+          <a:p>
+            <a:pPr marL="285840" indent="-285840">
+              <a:lnSpc>
+                <a:spcPct val="100000"/>
+              </a:lnSpc>
+              <a:buClr>
+                <a:srgbClr val="FFFFFF"/>
+              </a:buClr>
+              <a:buFont typeface="OpenSymbol"/>
+              <a:buChar char="-"/>
+            </a:pPr>
+            <a:r>
+              <a:rPr lang="fr-FR" sz="1500" b="1" u="none" strike="noStrike">
+                <a:solidFill>
+                  <a:schemeClr val="lt1"/>
+                </a:solidFill>
+                <a:effectLst/>
+                <a:uFillTx/>
+                <a:latin typeface="Arial"/>
+              </a:rPr>
+              <a:t>Disk Id : </a:t>
+            </a:r>
+            <a:r>
+              <a:rPr lang="fr-FR" sz="1500" b="0" u="none" strike="noStrike">
+                <a:solidFill>
+                  <a:schemeClr val="lt1"/>
+                </a:solidFill>
+                <a:effectLst/>
+                <a:uFillTx/>
+                <a:latin typeface="Arial"/>
+              </a:rPr>
+              <a:t>{635b1203-467e-11ea-ba75-000c295e7ac0}</a:t>
+            </a:r>
+            <a:endParaRPr lang="en-GB" sz="1500" b="0" u="none" strike="noStrike">
+              <a:solidFill>
+                <a:srgbClr val="000000"/>
+              </a:solidFill>
+              <a:effectLst/>
+              <a:uFillTx/>
+              <a:latin typeface="Arial"/>
+            </a:endParaRPr>
+          </a:p>
+        </p:txBody>
+      </p:sp>
+      <p:pic>
+        <p:nvPicPr>
+          <p:cNvPr id="54" name="USBSTOR 54"/>
+          <p:cNvPicPr/>
+          <p:nvPr/>
+        </p:nvPicPr>
+        <p:blipFill>
+          <a:blip r:embed="rId1"/>
+          <a:stretch/>
+        </p:blipFill>
+        <p:spPr>
+          <a:xfrm>
+            <a:off x="596000" y="3700000"/>
+            <a:ext cx="11000000" cy="1488000"/>
+          </a:xfrm>
+          <a:prstGeom prst="rect">
+            <a:avLst/>
+          </a:prstGeom>
+          <a:noFill/>
+          <a:ln w="0">
+            <a:noFill/>
+          </a:ln>
+        </p:spPr>
+      </p:pic>
+      <p:sp>
+        <p:nvSpPr>
+          <p:cNvPr id="55" name="Legende 55"/>
+          <p:cNvSpPr/>
+          <p:nvPr/>
+        </p:nvSpPr>
+        <p:spPr>
+          <a:xfrm>
+            <a:off x="596000" y="5240000"/>
+            <a:ext cx="11000000" cy="250000"/>
+          </a:xfrm>
+          <a:prstGeom prst="rect">
+            <a:avLst/>
+          </a:prstGeom>
+          <a:noFill/>
+          <a:ln w="0">
+            <a:noFill/>
+          </a:ln>
+        </p:spPr>
+        <p:txBody>
+          <a:bodyPr lIns="0" tIns="0" rIns="0" bIns="0" anchor="t"/>
+          <a:p>
+            <a:pPr algn="ctr">
+              <a:buNone/>
+            </a:pPr>
+            <a:r>
+              <a:rPr lang="fr-FR" sz="1100" b="0" i="1" u="none" strike="noStrike">
+                <a:solidFill>
+                  <a:srgbClr val="B8C4D9"/>
+                </a:solidFill>
+                <a:effectLst/>
+                <a:uFillTx/>
+                <a:latin typeface="Arial"/>
+              </a:rPr>
+              <a:t>Clé USBSTOR : modèle, numéro de série et Disk Id</a:t>
+            </a:r>
           </a:p>
         </p:txBody>
       </p:sp>
@@ -3980,7 +4287,7 @@
       </p:grpSpPr>
       <p:sp>
         <p:nvSpPr>
-          <p:cNvPr id="55" name="PlaceHolder 1"/>
+          <p:cNvPr id="52" name="PlaceHolder 1"/>
           <p:cNvSpPr>
             <a:spLocks noGrp="1"/>
           </p:cNvSpPr>
@@ -4037,6 +4344,373 @@
               <a:uFillTx/>
               <a:latin typeface="Calibri"/>
             </a:endParaRPr>
+          </a:p>
+        </p:txBody>
+      </p:sp>
+      <p:sp>
+        <p:nvSpPr>
+          <p:cNvPr id="53" name="ZoneTexte 53"/>
+          <p:cNvSpPr/>
+          <p:nvPr/>
+        </p:nvSpPr>
+        <p:spPr>
+          <a:xfrm>
+            <a:off x="609480" y="1400000"/>
+            <a:ext cx="10900000" cy="2200000"/>
+          </a:xfrm>
+          <a:prstGeom prst="rect">
+            <a:avLst/>
+          </a:prstGeom>
+          <a:noFill/>
+          <a:ln w="0">
+            <a:noFill/>
+          </a:ln>
+        </p:spPr>
+        <p:style>
+          <a:lnRef idx="0"/>
+          <a:fillRef idx="0"/>
+          <a:effectRef idx="0"/>
+          <a:fontRef idx="minor"/>
+        </p:style>
+        <p:txBody>
+          <a:bodyPr lIns="90000" tIns="45000" rIns="90000" bIns="45000" anchor="t">
+            <a:spAutoFit/>
+          </a:bodyPr>
+          <a:p>
+            <a:pPr marL="285840" indent="-285840">
+              <a:lnSpc>
+                <a:spcPct val="100000"/>
+              </a:lnSpc>
+              <a:buClr>
+                <a:srgbClr val="FFFFFF"/>
+              </a:buClr>
+              <a:buFont typeface="OpenSymbol"/>
+              <a:buChar char="-"/>
+            </a:pPr>
+            <a:r>
+              <a:rPr lang="fr-FR" sz="1500" b="1" u="none" strike="noStrike">
+                <a:solidFill>
+                  <a:schemeClr val="lt1"/>
+                </a:solidFill>
+                <a:effectLst/>
+                <a:uFillTx/>
+                <a:latin typeface="Arial"/>
+              </a:rPr>
+              <a:t>Horodatages exploitables </a:t>
+            </a:r>
+            <a:r>
+              <a:rPr lang="fr-FR" sz="1500" b="0" u="none" strike="noStrike">
+                <a:solidFill>
+                  <a:schemeClr val="lt1"/>
+                </a:solidFill>
+                <a:effectLst/>
+                <a:uFillTx/>
+                <a:latin typeface="Arial"/>
+              </a:rPr>
+              <a:t>(clé USBSTOR, périphérique 4C530000281008116284&amp;0) :</a:t>
+            </a:r>
+            <a:endParaRPr lang="en-GB" sz="1500" b="0" u="none" strike="noStrike">
+              <a:solidFill>
+                <a:srgbClr val="000000"/>
+              </a:solidFill>
+              <a:effectLst/>
+              <a:uFillTx/>
+              <a:latin typeface="Arial"/>
+            </a:endParaRPr>
+          </a:p>
+          <a:p>
+            <a:pPr marL="285840" indent="-285840">
+              <a:lnSpc>
+                <a:spcPct val="100000"/>
+              </a:lnSpc>
+              <a:buClr>
+                <a:srgbClr val="FFFFFF"/>
+              </a:buClr>
+              <a:buFont typeface="OpenSymbol"/>
+              <a:buChar char="-"/>
+            </a:pPr>
+            <a:r>
+              <a:rPr lang="fr-FR" sz="1500" b="1" u="none" strike="noStrike">
+                <a:solidFill>
+                  <a:schemeClr val="lt1"/>
+                </a:solidFill>
+                <a:effectLst/>
+                <a:uFillTx/>
+                <a:latin typeface="Arial"/>
+              </a:rPr>
+              <a:t>First Installed : </a:t>
+            </a:r>
+            <a:r>
+              <a:rPr lang="fr-FR" sz="1500" b="0" u="none" strike="noStrike">
+                <a:solidFill>
+                  <a:schemeClr val="lt1"/>
+                </a:solidFill>
+                <a:effectLst/>
+                <a:uFillTx/>
+                <a:latin typeface="Arial"/>
+              </a:rPr>
+              <a:t>03/02/2020 à 12:12:32</a:t>
+            </a:r>
+            <a:endParaRPr lang="en-GB" sz="1500" b="0" u="none" strike="noStrike">
+              <a:solidFill>
+                <a:srgbClr val="000000"/>
+              </a:solidFill>
+              <a:effectLst/>
+              <a:uFillTx/>
+              <a:latin typeface="Arial"/>
+            </a:endParaRPr>
+          </a:p>
+          <a:p>
+            <a:pPr marL="285840" indent="-285840">
+              <a:lnSpc>
+                <a:spcPct val="100000"/>
+              </a:lnSpc>
+              <a:buClr>
+                <a:srgbClr val="FFFFFF"/>
+              </a:buClr>
+              <a:buFont typeface="OpenSymbol"/>
+              <a:buChar char="-"/>
+            </a:pPr>
+            <a:r>
+              <a:rPr lang="fr-FR" sz="1500" b="1" u="none" strike="noStrike">
+                <a:solidFill>
+                  <a:schemeClr val="lt1"/>
+                </a:solidFill>
+                <a:effectLst/>
+                <a:uFillTx/>
+                <a:latin typeface="Arial"/>
+              </a:rPr>
+              <a:t>Last Connected : </a:t>
+            </a:r>
+            <a:r>
+              <a:rPr lang="fr-FR" sz="1500" b="0" u="none" strike="noStrike">
+                <a:solidFill>
+                  <a:schemeClr val="lt1"/>
+                </a:solidFill>
+                <a:effectLst/>
+                <a:uFillTx/>
+                <a:latin typeface="Arial"/>
+              </a:rPr>
+              <a:t>03/02/2020 à 12:44:21</a:t>
+            </a:r>
+            <a:endParaRPr lang="en-GB" sz="1500" b="0" u="none" strike="noStrike">
+              <a:solidFill>
+                <a:srgbClr val="000000"/>
+              </a:solidFill>
+              <a:effectLst/>
+              <a:uFillTx/>
+              <a:latin typeface="Arial"/>
+            </a:endParaRPr>
+          </a:p>
+          <a:p>
+            <a:pPr marL="285840" indent="-285840">
+              <a:lnSpc>
+                <a:spcPct val="100000"/>
+              </a:lnSpc>
+              <a:buClr>
+                <a:srgbClr val="FFFFFF"/>
+              </a:buClr>
+              <a:buFont typeface="OpenSymbol"/>
+              <a:buChar char="-"/>
+            </a:pPr>
+            <a:r>
+              <a:rPr lang="fr-FR" sz="1500" b="1" u="none" strike="noStrike">
+                <a:solidFill>
+                  <a:schemeClr val="lt1"/>
+                </a:solidFill>
+                <a:effectLst/>
+                <a:uFillTx/>
+                <a:latin typeface="Arial"/>
+              </a:rPr>
+              <a:t>Last Removed : </a:t>
+            </a:r>
+            <a:r>
+              <a:rPr lang="fr-FR" sz="1500" b="0" u="none" strike="noStrike">
+                <a:solidFill>
+                  <a:schemeClr val="lt1"/>
+                </a:solidFill>
+                <a:effectLst/>
+                <a:uFillTx/>
+                <a:latin typeface="Arial"/>
+              </a:rPr>
+              <a:t>03/02/2020 à 12:45:00</a:t>
+            </a:r>
+            <a:endParaRPr lang="en-GB" sz="1500" b="0" u="none" strike="noStrike">
+              <a:solidFill>
+                <a:srgbClr val="000000"/>
+              </a:solidFill>
+              <a:effectLst/>
+              <a:uFillTx/>
+              <a:latin typeface="Arial"/>
+            </a:endParaRPr>
+          </a:p>
+          <a:p>
+            <a:pPr marL="285840" indent="-285840">
+              <a:lnSpc>
+                <a:spcPct val="100000"/>
+              </a:lnSpc>
+              <a:buClr>
+                <a:srgbClr val="FFFFFF"/>
+              </a:buClr>
+              <a:buFont typeface="OpenSymbol"/>
+              <a:buChar char="-"/>
+            </a:pPr>
+            <a:r>
+              <a:rPr lang="fr-FR" sz="1500" b="1" u="none" strike="noStrike">
+                <a:solidFill>
+                  <a:schemeClr val="lt1"/>
+                </a:solidFill>
+                <a:effectLst/>
+                <a:uFillTx/>
+                <a:latin typeface="Arial"/>
+              </a:rPr>
+              <a:t>Fenêtre d'utilisation : </a:t>
+            </a:r>
+            <a:r>
+              <a:rPr lang="fr-FR" sz="1500" b="0" u="none" strike="noStrike">
+                <a:solidFill>
+                  <a:schemeClr val="lt1"/>
+                </a:solidFill>
+                <a:effectLst/>
+                <a:uFillTx/>
+                <a:latin typeface="Arial"/>
+              </a:rPr>
+              <a:t>environ 32 minutes le 03/02/2020, à comparer aux dates supposées de fuite</a:t>
+            </a:r>
+            <a:endParaRPr lang="en-GB" sz="1500" b="0" u="none" strike="noStrike">
+              <a:solidFill>
+                <a:srgbClr val="000000"/>
+              </a:solidFill>
+              <a:effectLst/>
+              <a:uFillTx/>
+              <a:latin typeface="Arial"/>
+            </a:endParaRPr>
+          </a:p>
+        </p:txBody>
+      </p:sp>
+      <p:pic>
+        <p:nvPicPr>
+          <p:cNvPr id="54" name="Zoom 54"/>
+          <p:cNvPicPr/>
+          <p:nvPr/>
+        </p:nvPicPr>
+        <p:blipFill>
+          <a:blip r:embed="rId1"/>
+          <a:stretch/>
+        </p:blipFill>
+        <p:spPr>
+          <a:xfrm>
+            <a:off x="596000" y="3200000"/>
+            <a:ext cx="11000000" cy="545000"/>
+          </a:xfrm>
+          <a:prstGeom prst="rect">
+            <a:avLst/>
+          </a:prstGeom>
+          <a:noFill/>
+          <a:ln w="0">
+            <a:noFill/>
+          </a:ln>
+        </p:spPr>
+      </p:pic>
+      <p:sp>
+        <p:nvSpPr>
+          <p:cNvPr id="55" name="Legende 55"/>
+          <p:cNvSpPr/>
+          <p:nvPr/>
+        </p:nvSpPr>
+        <p:spPr>
+          <a:xfrm>
+            <a:off x="596000" y="3800000"/>
+            <a:ext cx="11000000" cy="250000"/>
+          </a:xfrm>
+          <a:prstGeom prst="rect">
+            <a:avLst/>
+          </a:prstGeom>
+          <a:noFill/>
+          <a:ln w="0">
+            <a:noFill/>
+          </a:ln>
+        </p:spPr>
+        <p:txBody>
+          <a:bodyPr lIns="0" tIns="0" rIns="0" bIns="0" anchor="t"/>
+          <a:p>
+            <a:pPr algn="ctr">
+              <a:buNone/>
+            </a:pPr>
+            <a:r>
+              <a:rPr lang="fr-FR" sz="1100" b="0" i="1" u="none" strike="noStrike">
+                <a:solidFill>
+                  <a:srgbClr val="B8C4D9"/>
+                </a:solidFill>
+                <a:effectLst/>
+                <a:uFillTx/>
+                <a:latin typeface="Arial"/>
+              </a:rPr>
+              <a:t>Zoom : horodatages complets de la clé USB</a:t>
+            </a:r>
+          </a:p>
+        </p:txBody>
+      </p:sp>
+      <p:pic>
+        <p:nvPicPr>
+          <p:cNvPr id="56" name="RegistryExplorer 56"/>
+          <p:cNvPicPr/>
+          <p:nvPr/>
+        </p:nvPicPr>
+        <p:blipFill>
+          <a:blip r:embed="rId2"/>
+          <a:stretch/>
+        </p:blipFill>
+        <p:spPr>
+          <a:xfrm>
+            <a:off x="2846000" y="4300000"/>
+            <a:ext cx="6500000" cy="1796000"/>
+          </a:xfrm>
+          <a:prstGeom prst="rect">
+            <a:avLst/>
+          </a:prstGeom>
+          <a:noFill/>
+          <a:ln w="0">
+            <a:noFill/>
+          </a:ln>
+        </p:spPr>
+      </p:pic>
+      <p:sp>
+        <p:nvSpPr>
+          <p:cNvPr id="57" name="Legende 57"/>
+          <p:cNvSpPr/>
+          <p:nvPr/>
+        </p:nvSpPr>
+        <p:spPr>
+          <a:xfrm>
+            <a:off x="2846000" y="6150000"/>
+            <a:ext cx="6500000" cy="250000"/>
+          </a:xfrm>
+          <a:prstGeom prst="rect">
+            <a:avLst/>
+          </a:prstGeom>
+          <a:noFill/>
+          <a:ln w="0">
+            <a:noFill/>
+          </a:ln>
+        </p:spPr>
+        <p:txBody>
+          <a:bodyPr lIns="0" tIns="0" rIns="0" bIns="0" anchor="t"/>
+          <a:p>
+            <a:pPr algn="ctr">
+              <a:buNone/>
+            </a:pPr>
+            <a:r>
+              <a:rPr lang="fr-FR" sz="1100" b="0" i="1" u="none" strike="noStrike">
+                <a:solidFill>
+                  <a:srgbClr val="B8C4D9"/>
+                </a:solidFill>
+                <a:effectLst/>
+                <a:uFillTx/>
+                <a:latin typeface="Arial"/>
+              </a:rPr>
+              <a:t>Clé USBSTOR dans Registry Explorer (ruche SYSTEM)</a:t>
+            </a:r>
           </a:p>
         </p:txBody>
       </p:sp>
@@ -6259,6 +6933,337 @@
           </a:p>
         </p:txBody>
       </p:sp>
+      <p:sp>
+        <p:nvSpPr>
+          <p:cNvPr id="53" name="ZoneTexte 53"/>
+          <p:cNvSpPr/>
+          <p:nvPr/>
+        </p:nvSpPr>
+        <p:spPr>
+          <a:xfrm>
+            <a:off x="609480" y="1500000"/>
+            <a:ext cx="5300000" cy="3250000"/>
+          </a:xfrm>
+          <a:prstGeom prst="rect">
+            <a:avLst/>
+          </a:prstGeom>
+          <a:noFill/>
+          <a:ln w="0">
+            <a:noFill/>
+          </a:ln>
+        </p:spPr>
+        <p:style>
+          <a:lnRef idx="0"/>
+          <a:fillRef idx="0"/>
+          <a:effectRef idx="0"/>
+          <a:fontRef idx="minor"/>
+        </p:style>
+        <p:txBody>
+          <a:bodyPr lIns="90000" tIns="45000" rIns="90000" bIns="45000" anchor="t">
+            <a:spAutoFit/>
+          </a:bodyPr>
+          <a:p>
+            <a:pPr marL="285840" indent="-285840">
+              <a:lnSpc>
+                <a:spcPct val="100000"/>
+              </a:lnSpc>
+              <a:buClr>
+                <a:srgbClr val="FFFFFF"/>
+              </a:buClr>
+              <a:buFont typeface="OpenSymbol"/>
+              <a:buChar char="-"/>
+            </a:pPr>
+            <a:r>
+              <a:rPr lang="fr-FR" sz="1500" b="1" u="none" strike="noStrike">
+                <a:solidFill>
+                  <a:schemeClr val="lt1"/>
+                </a:solidFill>
+                <a:effectLst/>
+                <a:uFillTx/>
+                <a:latin typeface="Arial"/>
+              </a:rPr>
+              <a:t>Outil : </a:t>
+            </a:r>
+            <a:r>
+              <a:rPr lang="fr-FR" sz="1500" b="0" u="none" strike="noStrike">
+                <a:solidFill>
+                  <a:schemeClr val="lt1"/>
+                </a:solidFill>
+                <a:effectLst/>
+                <a:uFillTx/>
+                <a:latin typeface="Arial"/>
+              </a:rPr>
+              <a:t>Exterro FTK Imager 8.3.0.27, image au format E01</a:t>
+            </a:r>
+            <a:endParaRPr lang="en-GB" sz="1500" b="0" u="none" strike="noStrike">
+              <a:solidFill>
+                <a:srgbClr val="000000"/>
+              </a:solidFill>
+              <a:effectLst/>
+              <a:uFillTx/>
+              <a:latin typeface="Arial"/>
+            </a:endParaRPr>
+          </a:p>
+          <a:p>
+            <a:pPr>
+              <a:lnSpc>
+                <a:spcPct val="100000"/>
+              </a:lnSpc>
+            </a:pPr>
+            <a:endParaRPr lang="en-GB" sz="1500" b="0" u="none" strike="noStrike">
+              <a:solidFill>
+                <a:srgbClr val="000000"/>
+              </a:solidFill>
+              <a:effectLst/>
+              <a:uFillTx/>
+              <a:latin typeface="Arial"/>
+            </a:endParaRPr>
+          </a:p>
+          <a:p>
+            <a:pPr marL="285840" indent="-285840">
+              <a:lnSpc>
+                <a:spcPct val="100000"/>
+              </a:lnSpc>
+              <a:buClr>
+                <a:srgbClr val="FFFFFF"/>
+              </a:buClr>
+              <a:buFont typeface="OpenSymbol"/>
+              <a:buChar char="-"/>
+            </a:pPr>
+            <a:r>
+              <a:rPr lang="fr-FR" sz="1500" b="1" u="none" strike="noStrike">
+                <a:solidFill>
+                  <a:schemeClr val="lt1"/>
+                </a:solidFill>
+                <a:effectLst/>
+                <a:uFillTx/>
+                <a:latin typeface="Arial"/>
+              </a:rPr>
+              <a:t>Image bit-à-bit : </a:t>
+            </a:r>
+            <a:r>
+              <a:rPr lang="fr-FR" sz="1500" b="0" u="none" strike="noStrike">
+                <a:solidFill>
+                  <a:schemeClr val="lt1"/>
+                </a:solidFill>
+                <a:effectLst/>
+                <a:uFillTx/>
+                <a:latin typeface="Arial"/>
+              </a:rPr>
+              <a:t>disque physique complet (PHYSICALDRIVE0), 125 829 120 secteurs, aucun bloc défectueux</a:t>
+            </a:r>
+            <a:endParaRPr lang="en-GB" sz="1500" b="0" u="none" strike="noStrike">
+              <a:solidFill>
+                <a:srgbClr val="000000"/>
+              </a:solidFill>
+              <a:effectLst/>
+              <a:uFillTx/>
+              <a:latin typeface="Arial"/>
+            </a:endParaRPr>
+          </a:p>
+          <a:p>
+            <a:pPr>
+              <a:lnSpc>
+                <a:spcPct val="100000"/>
+              </a:lnSpc>
+            </a:pPr>
+            <a:endParaRPr lang="en-GB" sz="1500" b="0" u="none" strike="noStrike">
+              <a:solidFill>
+                <a:srgbClr val="000000"/>
+              </a:solidFill>
+              <a:effectLst/>
+              <a:uFillTx/>
+              <a:latin typeface="Arial"/>
+            </a:endParaRPr>
+          </a:p>
+          <a:p>
+            <a:pPr marL="285840" indent="-285840">
+              <a:lnSpc>
+                <a:spcPct val="100000"/>
+              </a:lnSpc>
+              <a:buClr>
+                <a:srgbClr val="FFFFFF"/>
+              </a:buClr>
+              <a:buFont typeface="OpenSymbol"/>
+              <a:buChar char="-"/>
+            </a:pPr>
+            <a:r>
+              <a:rPr lang="fr-FR" sz="1500" b="1" u="none" strike="noStrike">
+                <a:solidFill>
+                  <a:schemeClr val="lt1"/>
+                </a:solidFill>
+                <a:effectLst/>
+                <a:uFillTx/>
+                <a:latin typeface="Arial"/>
+              </a:rPr>
+              <a:t>Intégrité vérifiée : </a:t>
+            </a:r>
+            <a:r>
+              <a:rPr lang="fr-FR" sz="1500" b="0" u="none" strike="noStrike">
+                <a:solidFill>
+                  <a:schemeClr val="lt1"/>
+                </a:solidFill>
+                <a:effectLst/>
+                <a:uFillTx/>
+                <a:latin typeface="Arial"/>
+              </a:rPr>
+              <a:t>MD5 et SHA1 concordants (Verify result : Match)</a:t>
+            </a:r>
+            <a:endParaRPr lang="en-GB" sz="1500" b="0" u="none" strike="noStrike">
+              <a:solidFill>
+                <a:srgbClr val="000000"/>
+              </a:solidFill>
+              <a:effectLst/>
+              <a:uFillTx/>
+              <a:latin typeface="Arial"/>
+            </a:endParaRPr>
+          </a:p>
+          <a:p>
+            <a:pPr>
+              <a:lnSpc>
+                <a:spcPct val="100000"/>
+              </a:lnSpc>
+            </a:pPr>
+            <a:endParaRPr lang="en-GB" sz="1500" b="0" u="none" strike="noStrike">
+              <a:solidFill>
+                <a:srgbClr val="000000"/>
+              </a:solidFill>
+              <a:effectLst/>
+              <a:uFillTx/>
+              <a:latin typeface="Arial"/>
+            </a:endParaRPr>
+          </a:p>
+          <a:p>
+            <a:pPr marL="285840" indent="-285840">
+              <a:lnSpc>
+                <a:spcPct val="100000"/>
+              </a:lnSpc>
+              <a:buClr>
+                <a:srgbClr val="FFFFFF"/>
+              </a:buClr>
+              <a:buFont typeface="OpenSymbol"/>
+              <a:buChar char="-"/>
+            </a:pPr>
+            <a:r>
+              <a:rPr lang="fr-FR" sz="1500" b="1" u="none" strike="noStrike">
+                <a:solidFill>
+                  <a:schemeClr val="lt1"/>
+                </a:solidFill>
+                <a:effectLst/>
+                <a:uFillTx/>
+                <a:latin typeface="Arial"/>
+              </a:rPr>
+              <a:t>Fichiers suspects : </a:t>
+            </a:r>
+            <a:r>
+              <a:rPr lang="fr-FR" sz="1500" b="0" u="none" strike="noStrike">
+                <a:solidFill>
+                  <a:schemeClr val="lt1"/>
+                </a:solidFill>
+                <a:effectLst/>
+                <a:uFillTx/>
+                <a:latin typeface="Arial"/>
+              </a:rPr>
+              <a:t>Env.exe (52 Ko) et Res.exe (25 Ko) retrouvés dans l'image avec les DLL Qt5 / MinGW</a:t>
+            </a:r>
+            <a:endParaRPr lang="en-GB" sz="1500" b="0" u="none" strike="noStrike">
+              <a:solidFill>
+                <a:srgbClr val="000000"/>
+              </a:solidFill>
+              <a:effectLst/>
+              <a:uFillTx/>
+              <a:latin typeface="Arial"/>
+            </a:endParaRPr>
+          </a:p>
+        </p:txBody>
+      </p:sp>
+      <p:pic>
+        <p:nvPicPr>
+          <p:cNvPr id="54" name="Verify 54"/>
+          <p:cNvPicPr/>
+          <p:nvPr/>
+        </p:nvPicPr>
+        <p:blipFill>
+          <a:blip r:embed="rId1"/>
+          <a:stretch/>
+        </p:blipFill>
+        <p:spPr>
+          <a:xfrm>
+            <a:off x="7175000" y="1450000"/>
+            <a:ext cx="3500000" cy="2293000"/>
+          </a:xfrm>
+          <a:prstGeom prst="rect">
+            <a:avLst/>
+          </a:prstGeom>
+          <a:noFill/>
+          <a:ln w="0">
+            <a:noFill/>
+          </a:ln>
+        </p:spPr>
+      </p:pic>
+      <p:pic>
+        <p:nvPicPr>
+          <p:cNvPr id="55" name="FTK 55"/>
+          <p:cNvPicPr/>
+          <p:nvPr/>
+        </p:nvPicPr>
+        <p:blipFill>
+          <a:blip r:embed="rId2"/>
+          <a:stretch/>
+        </p:blipFill>
+        <p:spPr>
+          <a:xfrm>
+            <a:off x="6250000" y="3950000"/>
+            <a:ext cx="5350000" cy="2179000"/>
+          </a:xfrm>
+          <a:prstGeom prst="rect">
+            <a:avLst/>
+          </a:prstGeom>
+          <a:noFill/>
+          <a:ln w="0">
+            <a:noFill/>
+          </a:ln>
+        </p:spPr>
+      </p:pic>
+      <p:sp>
+        <p:nvSpPr>
+          <p:cNvPr id="56" name="Legende 56"/>
+          <p:cNvSpPr/>
+          <p:nvPr/>
+        </p:nvSpPr>
+        <p:spPr>
+          <a:xfrm>
+            <a:off x="6250000" y="6180000"/>
+            <a:ext cx="5350000" cy="250000"/>
+          </a:xfrm>
+          <a:prstGeom prst="rect">
+            <a:avLst/>
+          </a:prstGeom>
+          <a:noFill/>
+          <a:ln w="0">
+            <a:noFill/>
+          </a:ln>
+        </p:spPr>
+        <p:txBody>
+          <a:bodyPr lIns="0" tIns="0" rIns="0" bIns="0" anchor="t"/>
+          <a:p>
+            <a:pPr algn="ctr">
+              <a:buNone/>
+            </a:pPr>
+            <a:r>
+              <a:rPr lang="fr-FR" sz="1100" b="0" i="1" u="none" strike="noStrike">
+                <a:solidFill>
+                  <a:srgbClr val="B8C4D9"/>
+                </a:solidFill>
+                <a:effectLst/>
+                <a:uFillTx/>
+                <a:latin typeface="Arial"/>
+              </a:rPr>
+              <a:t>Intégrité de l'image E01 et fichiers suspects localisés</a:t>
+            </a:r>
+          </a:p>
+        </p:txBody>
+      </p:sp>
     </p:spTree>
   </p:cSld>
   <mc:AlternateContent>
@@ -6291,7 +7296,7 @@
       </p:grpSpPr>
       <p:sp>
         <p:nvSpPr>
-          <p:cNvPr id="53" name="PlaceHolder 1"/>
+          <p:cNvPr id="52" name="PlaceHolder 1"/>
           <p:cNvSpPr>
             <a:spLocks noGrp="1"/>
           </p:cNvSpPr>
@@ -6348,6 +7353,313 @@
               <a:uFillTx/>
               <a:latin typeface="Calibri"/>
             </a:endParaRPr>
+          </a:p>
+        </p:txBody>
+      </p:sp>
+      <p:sp>
+        <p:nvSpPr>
+          <p:cNvPr id="53" name="ZoneTexte 53"/>
+          <p:cNvSpPr/>
+          <p:nvPr/>
+        </p:nvSpPr>
+        <p:spPr>
+          <a:xfrm>
+            <a:off x="609480" y="1400000"/>
+            <a:ext cx="10900000" cy="2900000"/>
+          </a:xfrm>
+          <a:prstGeom prst="rect">
+            <a:avLst/>
+          </a:prstGeom>
+          <a:noFill/>
+          <a:ln w="0">
+            <a:noFill/>
+          </a:ln>
+        </p:spPr>
+        <p:style>
+          <a:lnRef idx="0"/>
+          <a:fillRef idx="0"/>
+          <a:effectRef idx="0"/>
+          <a:fontRef idx="minor"/>
+        </p:style>
+        <p:txBody>
+          <a:bodyPr lIns="90000" tIns="45000" rIns="90000" bIns="45000" anchor="t">
+            <a:spAutoFit/>
+          </a:bodyPr>
+          <a:p>
+            <a:pPr marL="285840" indent="-285840">
+              <a:lnSpc>
+                <a:spcPct val="100000"/>
+              </a:lnSpc>
+              <a:buClr>
+                <a:srgbClr val="FFFFFF"/>
+              </a:buClr>
+              <a:buFont typeface="OpenSymbol"/>
+              <a:buChar char="-"/>
+            </a:pPr>
+            <a:r>
+              <a:rPr lang="fr-FR" sz="1500" b="1" u="none" strike="noStrike">
+                <a:solidFill>
+                  <a:schemeClr val="lt1"/>
+                </a:solidFill>
+                <a:effectLst/>
+                <a:uFillTx/>
+                <a:latin typeface="Arial"/>
+              </a:rPr>
+              <a:t>Outil : </a:t>
+            </a:r>
+            <a:r>
+              <a:rPr lang="fr-FR" sz="1500" b="0" u="none" strike="noStrike">
+                <a:solidFill>
+                  <a:schemeClr val="lt1"/>
+                </a:solidFill>
+                <a:effectLst/>
+                <a:uFillTx/>
+                <a:latin typeface="Arial"/>
+              </a:rPr>
+              <a:t>Volatility 3 (windows.pslist, netscan, registry.printkey) sur un dump mémoire de 5,86 Go acquis avec DumpIt</a:t>
+            </a:r>
+            <a:endParaRPr lang="en-GB" sz="1500" b="0" u="none" strike="noStrike">
+              <a:solidFill>
+                <a:srgbClr val="000000"/>
+              </a:solidFill>
+              <a:effectLst/>
+              <a:uFillTx/>
+              <a:latin typeface="Arial"/>
+            </a:endParaRPr>
+          </a:p>
+          <a:p>
+            <a:pPr>
+              <a:lnSpc>
+                <a:spcPct val="100000"/>
+              </a:lnSpc>
+            </a:pPr>
+            <a:endParaRPr lang="en-GB" sz="1500" b="0" u="none" strike="noStrike">
+              <a:solidFill>
+                <a:srgbClr val="000000"/>
+              </a:solidFill>
+              <a:effectLst/>
+              <a:uFillTx/>
+              <a:latin typeface="Arial"/>
+            </a:endParaRPr>
+          </a:p>
+          <a:p>
+            <a:pPr marL="285840" indent="-285840">
+              <a:lnSpc>
+                <a:spcPct val="100000"/>
+              </a:lnSpc>
+              <a:buClr>
+                <a:srgbClr val="FFFFFF"/>
+              </a:buClr>
+              <a:buFont typeface="OpenSymbol"/>
+              <a:buChar char="-"/>
+            </a:pPr>
+            <a:r>
+              <a:rPr lang="fr-FR" sz="1500" b="1" u="none" strike="noStrike">
+                <a:solidFill>
+                  <a:schemeClr val="lt1"/>
+                </a:solidFill>
+                <a:effectLst/>
+                <a:uFillTx/>
+                <a:latin typeface="Arial"/>
+              </a:rPr>
+              <a:t>Correspondance mémoire / disque : </a:t>
+            </a:r>
+            <a:r>
+              <a:rPr lang="fr-FR" sz="1500" b="0" u="none" strike="noStrike">
+                <a:solidFill>
+                  <a:schemeClr val="lt1"/>
+                </a:solidFill>
+                <a:effectLst/>
+                <a:uFillTx/>
+                <a:latin typeface="Arial"/>
+              </a:rPr>
+              <a:t>Res.exe (PID 7356) actif en mémoire, lancé par explorer.exe (PPID 3296) — même binaire que celui identifié sur l'image disque (US7)</a:t>
+            </a:r>
+            <a:endParaRPr lang="en-GB" sz="1500" b="0" u="none" strike="noStrike">
+              <a:solidFill>
+                <a:srgbClr val="000000"/>
+              </a:solidFill>
+              <a:effectLst/>
+              <a:uFillTx/>
+              <a:latin typeface="Arial"/>
+            </a:endParaRPr>
+          </a:p>
+          <a:p>
+            <a:pPr>
+              <a:lnSpc>
+                <a:spcPct val="100000"/>
+              </a:lnSpc>
+            </a:pPr>
+            <a:endParaRPr lang="en-GB" sz="1500" b="0" u="none" strike="noStrike">
+              <a:solidFill>
+                <a:srgbClr val="000000"/>
+              </a:solidFill>
+              <a:effectLst/>
+              <a:uFillTx/>
+              <a:latin typeface="Arial"/>
+            </a:endParaRPr>
+          </a:p>
+          <a:p>
+            <a:pPr marL="285840" indent="-285840">
+              <a:lnSpc>
+                <a:spcPct val="100000"/>
+              </a:lnSpc>
+              <a:buClr>
+                <a:srgbClr val="FFFFFF"/>
+              </a:buClr>
+              <a:buFont typeface="OpenSymbol"/>
+              <a:buChar char="-"/>
+            </a:pPr>
+            <a:r>
+              <a:rPr lang="fr-FR" sz="1500" b="1" u="none" strike="noStrike">
+                <a:solidFill>
+                  <a:schemeClr val="lt1"/>
+                </a:solidFill>
+                <a:effectLst/>
+                <a:uFillTx/>
+                <a:latin typeface="Arial"/>
+              </a:rPr>
+              <a:t>Persistance : </a:t>
+            </a:r>
+            <a:r>
+              <a:rPr lang="fr-FR" sz="1500" b="0" u="none" strike="noStrike">
+                <a:solidFill>
+                  <a:schemeClr val="lt1"/>
+                </a:solidFill>
+                <a:effectLst/>
+                <a:uFillTx/>
+                <a:latin typeface="Arial"/>
+              </a:rPr>
+              <a:t>aucune entrée liée au malware dans CurrentVersion\Run (seuls SecurityHealth et VMware User Process)</a:t>
+            </a:r>
+            <a:endParaRPr lang="en-GB" sz="1500" b="0" u="none" strike="noStrike">
+              <a:solidFill>
+                <a:srgbClr val="000000"/>
+              </a:solidFill>
+              <a:effectLst/>
+              <a:uFillTx/>
+              <a:latin typeface="Arial"/>
+            </a:endParaRPr>
+          </a:p>
+          <a:p>
+            <a:pPr>
+              <a:lnSpc>
+                <a:spcPct val="100000"/>
+              </a:lnSpc>
+            </a:pPr>
+            <a:endParaRPr lang="en-GB" sz="1500" b="0" u="none" strike="noStrike">
+              <a:solidFill>
+                <a:srgbClr val="000000"/>
+              </a:solidFill>
+              <a:effectLst/>
+              <a:uFillTx/>
+              <a:latin typeface="Arial"/>
+            </a:endParaRPr>
+          </a:p>
+          <a:p>
+            <a:pPr marL="285840" indent="-285840">
+              <a:lnSpc>
+                <a:spcPct val="100000"/>
+              </a:lnSpc>
+              <a:buClr>
+                <a:srgbClr val="FFFFFF"/>
+              </a:buClr>
+              <a:buFont typeface="OpenSymbol"/>
+              <a:buChar char="-"/>
+            </a:pPr>
+            <a:r>
+              <a:rPr lang="fr-FR" sz="1500" b="1" u="none" strike="noStrike">
+                <a:solidFill>
+                  <a:schemeClr val="lt1"/>
+                </a:solidFill>
+                <a:effectLst/>
+                <a:uFillTx/>
+                <a:latin typeface="Arial"/>
+              </a:rPr>
+              <a:t>Réseau : </a:t>
+            </a:r>
+            <a:r>
+              <a:rPr lang="fr-FR" sz="1500" b="0" u="none" strike="noStrike">
+                <a:solidFill>
+                  <a:schemeClr val="lt1"/>
+                </a:solidFill>
+                <a:effectLst/>
+                <a:uFillTx/>
+                <a:latin typeface="Arial"/>
+              </a:rPr>
+              <a:t>netscan ne remonte aucune connexion pour le PID 7356, cohérent avec l'absence de flux Wireshark (US4)</a:t>
+            </a:r>
+            <a:endParaRPr lang="en-GB" sz="1500" b="0" u="none" strike="noStrike">
+              <a:solidFill>
+                <a:srgbClr val="000000"/>
+              </a:solidFill>
+              <a:effectLst/>
+              <a:uFillTx/>
+              <a:latin typeface="Arial"/>
+            </a:endParaRPr>
+          </a:p>
+        </p:txBody>
+      </p:sp>
+      <p:pic>
+        <p:nvPicPr>
+          <p:cNvPr id="54" name="Volatility 54"/>
+          <p:cNvPicPr/>
+          <p:nvPr/>
+        </p:nvPicPr>
+        <p:blipFill>
+          <a:blip r:embed="rId1"/>
+          <a:stretch/>
+        </p:blipFill>
+        <p:spPr>
+          <a:xfrm>
+            <a:off x="1096000" y="3900000"/>
+            <a:ext cx="10000000" cy="1618000"/>
+          </a:xfrm>
+          <a:prstGeom prst="rect">
+            <a:avLst/>
+          </a:prstGeom>
+          <a:noFill/>
+          <a:ln w="0">
+            <a:noFill/>
+          </a:ln>
+        </p:spPr>
+      </p:pic>
+      <p:sp>
+        <p:nvSpPr>
+          <p:cNvPr id="55" name="Legende 55"/>
+          <p:cNvSpPr/>
+          <p:nvPr/>
+        </p:nvSpPr>
+        <p:spPr>
+          <a:xfrm>
+            <a:off x="1096000" y="5570000"/>
+            <a:ext cx="10000000" cy="250000"/>
+          </a:xfrm>
+          <a:prstGeom prst="rect">
+            <a:avLst/>
+          </a:prstGeom>
+          <a:noFill/>
+          <a:ln w="0">
+            <a:noFill/>
+          </a:ln>
+        </p:spPr>
+        <p:txBody>
+          <a:bodyPr lIns="0" tIns="0" rIns="0" bIns="0" anchor="t"/>
+          <a:p>
+            <a:pPr algn="ctr">
+              <a:buNone/>
+            </a:pPr>
+            <a:r>
+              <a:rPr lang="fr-FR" sz="1100" b="0" i="1" u="none" strike="noStrike">
+                <a:solidFill>
+                  <a:srgbClr val="B8C4D9"/>
+                </a:solidFill>
+                <a:effectLst/>
+                <a:uFillTx/>
+                <a:latin typeface="Arial"/>
+              </a:rPr>
+              <a:t>Res.exe présent en mémoire (pslist) et absent de netscan</a:t>
+            </a:r>
           </a:p>
         </p:txBody>
       </p:sp>

--- a/Présentation.pptx
+++ b/Présentation.pptx
@@ -1,35 +1,131 @@
 
 <file path=ppt/presentation.xml><?xml version="1.0" encoding="utf-8"?>
-<p:presentation xmlns:a="http://schemas.openxmlformats.org/drawingml/2006/main" xmlns:p="http://schemas.openxmlformats.org/presentationml/2006/main" xmlns:r="http://schemas.openxmlformats.org/officeDocument/2006/relationships" xmlns:p14="http://schemas.microsoft.com/office/powerpoint/2010/main" xmlns:p15="http://schemas.microsoft.com/office/powerpoint/2012/main" xmlns:mc="http://schemas.openxmlformats.org/markup-compatibility/2006">
+<p:presentation xmlns:a="http://schemas.openxmlformats.org/drawingml/2006/main" xmlns:r="http://schemas.openxmlformats.org/officeDocument/2006/relationships" xmlns:p="http://schemas.openxmlformats.org/presentationml/2006/main">
   <p:sldMasterIdLst>
-    <p:sldMasterId id="2147483648" r:id="rId2"/>
+    <p:sldMasterId id="2147483648" r:id="rId1"/>
   </p:sldMasterIdLst>
   <p:sldIdLst>
-    <p:sldId id="256" r:id="rId3"/>
-    <p:sldId id="257" r:id="rId4"/>
-    <p:sldId id="258" r:id="rId5"/>
-    <p:sldId id="259" r:id="rId6"/>
-    <p:sldId id="260" r:id="rId7"/>
-    <p:sldId id="261" r:id="rId8"/>
-    <p:sldId id="262" r:id="rId9"/>
-    <p:sldId id="263" r:id="rId10"/>
-    <p:sldId id="264" r:id="rId11"/>
-    <p:sldId id="265" r:id="rId12"/>
-    <p:sldId id="266" r:id="rId13"/>
+    <p:sldId id="256" r:id="rId2"/>
+    <p:sldId id="257" r:id="rId3"/>
+    <p:sldId id="258" r:id="rId4"/>
+    <p:sldId id="259" r:id="rId5"/>
+    <p:sldId id="260" r:id="rId6"/>
+    <p:sldId id="261" r:id="rId7"/>
+    <p:sldId id="262" r:id="rId8"/>
+    <p:sldId id="263" r:id="rId9"/>
+    <p:sldId id="264" r:id="rId10"/>
+    <p:sldId id="265" r:id="rId11"/>
+    <p:sldId id="266" r:id="rId12"/>
   </p:sldIdLst>
   <p:sldSz cx="12192000" cy="6858000"/>
   <p:notesSz cx="7559675" cy="10691813"/>
+  <p:defaultTextStyle>
+    <a:defPPr>
+      <a:defRPr lang="fr-FR"/>
+    </a:defPPr>
+    <a:lvl1pPr marL="0" algn="l" defTabSz="914400" rtl="0" eaLnBrk="1" latinLnBrk="0" hangingPunct="1">
+      <a:defRPr sz="1800" kern="1200">
+        <a:solidFill>
+          <a:schemeClr val="tx1"/>
+        </a:solidFill>
+        <a:latin typeface="+mn-lt"/>
+        <a:ea typeface="+mn-ea"/>
+        <a:cs typeface="+mn-cs"/>
+      </a:defRPr>
+    </a:lvl1pPr>
+    <a:lvl2pPr marL="457200" algn="l" defTabSz="914400" rtl="0" eaLnBrk="1" latinLnBrk="0" hangingPunct="1">
+      <a:defRPr sz="1800" kern="1200">
+        <a:solidFill>
+          <a:schemeClr val="tx1"/>
+        </a:solidFill>
+        <a:latin typeface="+mn-lt"/>
+        <a:ea typeface="+mn-ea"/>
+        <a:cs typeface="+mn-cs"/>
+      </a:defRPr>
+    </a:lvl2pPr>
+    <a:lvl3pPr marL="914400" algn="l" defTabSz="914400" rtl="0" eaLnBrk="1" latinLnBrk="0" hangingPunct="1">
+      <a:defRPr sz="1800" kern="1200">
+        <a:solidFill>
+          <a:schemeClr val="tx1"/>
+        </a:solidFill>
+        <a:latin typeface="+mn-lt"/>
+        <a:ea typeface="+mn-ea"/>
+        <a:cs typeface="+mn-cs"/>
+      </a:defRPr>
+    </a:lvl3pPr>
+    <a:lvl4pPr marL="1371600" algn="l" defTabSz="914400" rtl="0" eaLnBrk="1" latinLnBrk="0" hangingPunct="1">
+      <a:defRPr sz="1800" kern="1200">
+        <a:solidFill>
+          <a:schemeClr val="tx1"/>
+        </a:solidFill>
+        <a:latin typeface="+mn-lt"/>
+        <a:ea typeface="+mn-ea"/>
+        <a:cs typeface="+mn-cs"/>
+      </a:defRPr>
+    </a:lvl4pPr>
+    <a:lvl5pPr marL="1828800" algn="l" defTabSz="914400" rtl="0" eaLnBrk="1" latinLnBrk="0" hangingPunct="1">
+      <a:defRPr sz="1800" kern="1200">
+        <a:solidFill>
+          <a:schemeClr val="tx1"/>
+        </a:solidFill>
+        <a:latin typeface="+mn-lt"/>
+        <a:ea typeface="+mn-ea"/>
+        <a:cs typeface="+mn-cs"/>
+      </a:defRPr>
+    </a:lvl5pPr>
+    <a:lvl6pPr marL="2286000" algn="l" defTabSz="914400" rtl="0" eaLnBrk="1" latinLnBrk="0" hangingPunct="1">
+      <a:defRPr sz="1800" kern="1200">
+        <a:solidFill>
+          <a:schemeClr val="tx1"/>
+        </a:solidFill>
+        <a:latin typeface="+mn-lt"/>
+        <a:ea typeface="+mn-ea"/>
+        <a:cs typeface="+mn-cs"/>
+      </a:defRPr>
+    </a:lvl6pPr>
+    <a:lvl7pPr marL="2743200" algn="l" defTabSz="914400" rtl="0" eaLnBrk="1" latinLnBrk="0" hangingPunct="1">
+      <a:defRPr sz="1800" kern="1200">
+        <a:solidFill>
+          <a:schemeClr val="tx1"/>
+        </a:solidFill>
+        <a:latin typeface="+mn-lt"/>
+        <a:ea typeface="+mn-ea"/>
+        <a:cs typeface="+mn-cs"/>
+      </a:defRPr>
+    </a:lvl7pPr>
+    <a:lvl8pPr marL="3200400" algn="l" defTabSz="914400" rtl="0" eaLnBrk="1" latinLnBrk="0" hangingPunct="1">
+      <a:defRPr sz="1800" kern="1200">
+        <a:solidFill>
+          <a:schemeClr val="tx1"/>
+        </a:solidFill>
+        <a:latin typeface="+mn-lt"/>
+        <a:ea typeface="+mn-ea"/>
+        <a:cs typeface="+mn-cs"/>
+      </a:defRPr>
+    </a:lvl8pPr>
+    <a:lvl9pPr marL="3657600" algn="l" defTabSz="914400" rtl="0" eaLnBrk="1" latinLnBrk="0" hangingPunct="1">
+      <a:defRPr sz="1800" kern="1200">
+        <a:solidFill>
+          <a:schemeClr val="tx1"/>
+        </a:solidFill>
+        <a:latin typeface="+mn-lt"/>
+        <a:ea typeface="+mn-ea"/>
+        <a:cs typeface="+mn-cs"/>
+      </a:defRPr>
+    </a:lvl9pPr>
+  </p:defaultTextStyle>
 </p:presentation>
 </file>
 
 <file path=ppt/slideLayouts/slideLayout1.xml><?xml version="1.0" encoding="utf-8"?>
-<p:sldLayout xmlns:a="http://schemas.openxmlformats.org/drawingml/2006/main" xmlns:p="http://schemas.openxmlformats.org/presentationml/2006/main" xmlns:r="http://schemas.openxmlformats.org/officeDocument/2006/relationships" xmlns:p14="http://schemas.microsoft.com/office/powerpoint/2010/main" xmlns:p15="http://schemas.microsoft.com/office/powerpoint/2012/main" xmlns:mc="http://schemas.openxmlformats.org/markup-compatibility/2006" type="obj" preserve="1">
+<p:sldLayout xmlns:a="http://schemas.openxmlformats.org/drawingml/2006/main" xmlns:r="http://schemas.openxmlformats.org/officeDocument/2006/relationships" xmlns:p="http://schemas.openxmlformats.org/presentationml/2006/main" type="obj" preserve="1">
   <p:cSld name="Title Slide">
     <p:bg>
       <p:bgPr>
         <a:solidFill>
           <a:schemeClr val="lt1"/>
         </a:solidFill>
+        <a:effectLst/>
       </p:bgPr>
     </p:bg>
     <p:spTree>
@@ -137,14 +233,6 @@
               </a:rPr>
               <a:t>Click to edit the title text format</a:t>
             </a:r>
-            <a:endParaRPr lang="en-GB" sz="3200" b="0" u="none" strike="noStrike">
-              <a:solidFill>
-                <a:srgbClr val="000000"/>
-              </a:solidFill>
-              <a:effectLst/>
-              <a:uFillTx/>
-              <a:latin typeface="Calibri"/>
-            </a:endParaRPr>
           </a:p>
         </p:txBody>
       </p:sp>
@@ -215,14 +303,6 @@
               </a:rPr>
               <a:t> </a:t>
             </a:r>
-            <a:endParaRPr lang="en-GB" sz="1400" b="0" u="none" strike="noStrike">
-              <a:solidFill>
-                <a:srgbClr val="000000"/>
-              </a:solidFill>
-              <a:effectLst/>
-              <a:uFillTx/>
-              <a:latin typeface="Times New Roman"/>
-            </a:endParaRPr>
           </a:p>
         </p:txBody>
       </p:sp>
@@ -376,7 +456,7 @@
               <a:t>Partie</a:t>
             </a:r>
             <a:r>
-              <a:rPr lang="en-GB" sz="1000" b="1" u="none" spc="-45" strike="noStrike">
+              <a:rPr lang="en-GB" sz="1000" b="1" u="none" strike="noStrike" spc="-45">
                 <a:solidFill>
                   <a:schemeClr val="lt1"/>
                 </a:solidFill>
@@ -387,7 +467,7 @@
               <a:t> </a:t>
             </a:r>
             <a:fld id="{C53AEEED-0141-4948-9D83-3C768883F45C}" type="slidenum">
-              <a:rPr lang="en-GB" sz="1000" b="1" u="none" spc="-51" strike="noStrike">
+              <a:rPr lang="en-GB" sz="1000" b="1" u="none" strike="noStrike" spc="-51">
                 <a:solidFill>
                   <a:schemeClr val="lt1"/>
                 </a:solidFill>
@@ -395,7 +475,7 @@
                 <a:uFillTx/>
                 <a:latin typeface="Arial"/>
               </a:rPr>
-              <a:t>7</a:t>
+              <a:t>‹N°›</a:t>
             </a:fld>
             <a:endParaRPr lang="en-GB" sz="1000" b="0" u="none" strike="noStrike">
               <a:solidFill>
@@ -410,17 +490,21 @@
       </p:sp>
     </p:spTree>
   </p:cSld>
+  <p:clrMapOvr>
+    <a:masterClrMapping/>
+  </p:clrMapOvr>
 </p:sldLayout>
 </file>
 
 <file path=ppt/slideLayouts/slideLayout2.xml><?xml version="1.0" encoding="utf-8"?>
-<p:sldLayout xmlns:a="http://schemas.openxmlformats.org/drawingml/2006/main" xmlns:p="http://schemas.openxmlformats.org/presentationml/2006/main" xmlns:r="http://schemas.openxmlformats.org/officeDocument/2006/relationships" xmlns:p14="http://schemas.microsoft.com/office/powerpoint/2010/main" xmlns:p15="http://schemas.microsoft.com/office/powerpoint/2012/main" xmlns:mc="http://schemas.openxmlformats.org/markup-compatibility/2006" type="obj" preserve="1">
+<p:sldLayout xmlns:a="http://schemas.openxmlformats.org/drawingml/2006/main" xmlns:r="http://schemas.openxmlformats.org/officeDocument/2006/relationships" xmlns:p="http://schemas.openxmlformats.org/presentationml/2006/main" type="obj" preserve="1">
   <p:cSld name="Title and Content">
     <p:bg>
       <p:bgPr>
         <a:solidFill>
           <a:schemeClr val="lt1"/>
         </a:solidFill>
+        <a:effectLst/>
       </p:bgPr>
     </p:bg>
     <p:spTree>
@@ -528,14 +612,6 @@
               </a:rPr>
               <a:t>Click to edit the title text format</a:t>
             </a:r>
-            <a:endParaRPr lang="en-GB" sz="3200" b="0" u="none" strike="noStrike">
-              <a:solidFill>
-                <a:srgbClr val="000000"/>
-              </a:solidFill>
-              <a:effectLst/>
-              <a:uFillTx/>
-              <a:latin typeface="Calibri"/>
-            </a:endParaRPr>
           </a:p>
         </p:txBody>
       </p:sp>
@@ -748,14 +824,6 @@
               </a:rPr>
               <a:t>Click to edit the outline text format</a:t>
             </a:r>
-            <a:endParaRPr lang="en-GB" sz="2000" b="0" u="none" strike="noStrike">
-              <a:solidFill>
-                <a:srgbClr val="000000"/>
-              </a:solidFill>
-              <a:effectLst/>
-              <a:uFillTx/>
-              <a:latin typeface="Calibri"/>
-            </a:endParaRPr>
           </a:p>
           <a:p>
             <a:pPr marL="457200" lvl="1" indent="-324000" algn="l">
@@ -783,14 +851,6 @@
               </a:rPr>
               <a:t>Second Outline Level</a:t>
             </a:r>
-            <a:endParaRPr lang="en-GB" sz="2000" b="0" u="none" strike="noStrike">
-              <a:solidFill>
-                <a:srgbClr val="000000"/>
-              </a:solidFill>
-              <a:effectLst/>
-              <a:uFillTx/>
-              <a:latin typeface="Calibri"/>
-            </a:endParaRPr>
           </a:p>
           <a:p>
             <a:pPr marL="914400" lvl="2" indent="-288000" algn="l">
@@ -818,14 +878,6 @@
               </a:rPr>
               <a:t>Third Outline Level</a:t>
             </a:r>
-            <a:endParaRPr lang="en-GB" sz="2000" b="0" u="none" strike="noStrike">
-              <a:solidFill>
-                <a:srgbClr val="000000"/>
-              </a:solidFill>
-              <a:effectLst/>
-              <a:uFillTx/>
-              <a:latin typeface="Calibri"/>
-            </a:endParaRPr>
           </a:p>
           <a:p>
             <a:pPr marL="1371600" lvl="3" indent="-216000" algn="l">
@@ -853,14 +905,6 @@
               </a:rPr>
               <a:t>Fourth Outline Level</a:t>
             </a:r>
-            <a:endParaRPr lang="en-GB" sz="2000" b="0" u="none" strike="noStrike">
-              <a:solidFill>
-                <a:srgbClr val="000000"/>
-              </a:solidFill>
-              <a:effectLst/>
-              <a:uFillTx/>
-              <a:latin typeface="Calibri"/>
-            </a:endParaRPr>
           </a:p>
           <a:p>
             <a:pPr marL="1828800" lvl="4" indent="-216000" algn="l">
@@ -888,14 +932,6 @@
               </a:rPr>
               <a:t>Fifth Outline Level</a:t>
             </a:r>
-            <a:endParaRPr lang="en-GB" sz="2000" b="0" u="none" strike="noStrike">
-              <a:solidFill>
-                <a:srgbClr val="000000"/>
-              </a:solidFill>
-              <a:effectLst/>
-              <a:uFillTx/>
-              <a:latin typeface="Calibri"/>
-            </a:endParaRPr>
           </a:p>
           <a:p>
             <a:pPr marL="2286000" lvl="5" indent="-216000" algn="l">
@@ -923,14 +959,6 @@
               </a:rPr>
               <a:t>Sixth Outline Level</a:t>
             </a:r>
-            <a:endParaRPr lang="en-GB" sz="2000" b="0" u="none" strike="noStrike">
-              <a:solidFill>
-                <a:srgbClr val="000000"/>
-              </a:solidFill>
-              <a:effectLst/>
-              <a:uFillTx/>
-              <a:latin typeface="Calibri"/>
-            </a:endParaRPr>
           </a:p>
           <a:p>
             <a:pPr marL="2743200" lvl="6" indent="-216000" algn="l">
@@ -958,14 +986,6 @@
               </a:rPr>
               <a:t>Seventh Outline Level</a:t>
             </a:r>
-            <a:endParaRPr lang="en-GB" sz="2000" b="0" u="none" strike="noStrike">
-              <a:solidFill>
-                <a:srgbClr val="000000"/>
-              </a:solidFill>
-              <a:effectLst/>
-              <a:uFillTx/>
-              <a:latin typeface="Calibri"/>
-            </a:endParaRPr>
           </a:p>
         </p:txBody>
       </p:sp>
@@ -1036,14 +1056,6 @@
               </a:rPr>
               <a:t> </a:t>
             </a:r>
-            <a:endParaRPr lang="en-GB" sz="1400" b="0" u="none" strike="noStrike">
-              <a:solidFill>
-                <a:srgbClr val="000000"/>
-              </a:solidFill>
-              <a:effectLst/>
-              <a:uFillTx/>
-              <a:latin typeface="Times New Roman"/>
-            </a:endParaRPr>
           </a:p>
         </p:txBody>
       </p:sp>
@@ -1197,7 +1209,7 @@
               <a:t>Partie</a:t>
             </a:r>
             <a:r>
-              <a:rPr lang="en-GB" sz="1000" b="1" u="none" spc="-45" strike="noStrike">
+              <a:rPr lang="en-GB" sz="1000" b="1" u="none" strike="noStrike" spc="-45">
                 <a:solidFill>
                   <a:schemeClr val="lt1"/>
                 </a:solidFill>
@@ -1208,7 +1220,7 @@
               <a:t> </a:t>
             </a:r>
             <a:fld id="{66D8D55E-9E5C-49E1-97AD-1801839B3F3B}" type="slidenum">
-              <a:rPr lang="en-GB" sz="1000" b="1" u="none" spc="-51" strike="noStrike">
+              <a:rPr lang="en-GB" sz="1000" b="1" u="none" strike="noStrike" spc="-51">
                 <a:solidFill>
                   <a:schemeClr val="lt1"/>
                 </a:solidFill>
@@ -1216,7 +1228,7 @@
                 <a:uFillTx/>
                 <a:latin typeface="Arial"/>
               </a:rPr>
-              <a:t>7</a:t>
+              <a:t>‹N°›</a:t>
             </a:fld>
             <a:endParaRPr lang="en-GB" sz="1000" b="0" u="none" strike="noStrike">
               <a:solidFill>
@@ -1231,17 +1243,21 @@
       </p:sp>
     </p:spTree>
   </p:cSld>
+  <p:clrMapOvr>
+    <a:masterClrMapping/>
+  </p:clrMapOvr>
 </p:sldLayout>
 </file>
 
 <file path=ppt/slideLayouts/slideLayout3.xml><?xml version="1.0" encoding="utf-8"?>
-<p:sldLayout xmlns:a="http://schemas.openxmlformats.org/drawingml/2006/main" xmlns:p="http://schemas.openxmlformats.org/presentationml/2006/main" xmlns:r="http://schemas.openxmlformats.org/officeDocument/2006/relationships" xmlns:p14="http://schemas.microsoft.com/office/powerpoint/2010/main" xmlns:p15="http://schemas.microsoft.com/office/powerpoint/2012/main" xmlns:mc="http://schemas.openxmlformats.org/markup-compatibility/2006" type="obj" preserve="1">
+<p:sldLayout xmlns:a="http://schemas.openxmlformats.org/drawingml/2006/main" xmlns:r="http://schemas.openxmlformats.org/officeDocument/2006/relationships" xmlns:p="http://schemas.openxmlformats.org/presentationml/2006/main" type="obj" preserve="1">
   <p:cSld name="Two Content">
     <p:bg>
       <p:bgPr>
         <a:solidFill>
           <a:schemeClr val="lt1"/>
         </a:solidFill>
+        <a:effectLst/>
       </p:bgPr>
     </p:bg>
     <p:spTree>
@@ -1349,14 +1365,6 @@
               </a:rPr>
               <a:t>Click to edit the title text format</a:t>
             </a:r>
-            <a:endParaRPr lang="en-GB" sz="3200" b="0" u="none" strike="noStrike">
-              <a:solidFill>
-                <a:srgbClr val="000000"/>
-              </a:solidFill>
-              <a:effectLst/>
-              <a:uFillTx/>
-              <a:latin typeface="Calibri"/>
-            </a:endParaRPr>
           </a:p>
         </p:txBody>
       </p:sp>
@@ -1569,14 +1577,6 @@
               </a:rPr>
               <a:t>Click to edit the outline text format</a:t>
             </a:r>
-            <a:endParaRPr lang="en-GB" sz="2000" b="0" u="none" strike="noStrike">
-              <a:solidFill>
-                <a:srgbClr val="000000"/>
-              </a:solidFill>
-              <a:effectLst/>
-              <a:uFillTx/>
-              <a:latin typeface="Calibri"/>
-            </a:endParaRPr>
           </a:p>
           <a:p>
             <a:pPr marL="457200" lvl="1" indent="-324000" algn="l">
@@ -1604,14 +1604,6 @@
               </a:rPr>
               <a:t>Second Outline Level</a:t>
             </a:r>
-            <a:endParaRPr lang="en-GB" sz="2000" b="0" u="none" strike="noStrike">
-              <a:solidFill>
-                <a:srgbClr val="000000"/>
-              </a:solidFill>
-              <a:effectLst/>
-              <a:uFillTx/>
-              <a:latin typeface="Calibri"/>
-            </a:endParaRPr>
           </a:p>
           <a:p>
             <a:pPr marL="914400" lvl="2" indent="-288000" algn="l">
@@ -1639,14 +1631,6 @@
               </a:rPr>
               <a:t>Third Outline Level</a:t>
             </a:r>
-            <a:endParaRPr lang="en-GB" sz="2000" b="0" u="none" strike="noStrike">
-              <a:solidFill>
-                <a:srgbClr val="000000"/>
-              </a:solidFill>
-              <a:effectLst/>
-              <a:uFillTx/>
-              <a:latin typeface="Calibri"/>
-            </a:endParaRPr>
           </a:p>
           <a:p>
             <a:pPr marL="1371600" lvl="3" indent="-216000" algn="l">
@@ -1674,14 +1658,6 @@
               </a:rPr>
               <a:t>Fourth Outline Level</a:t>
             </a:r>
-            <a:endParaRPr lang="en-GB" sz="2000" b="0" u="none" strike="noStrike">
-              <a:solidFill>
-                <a:srgbClr val="000000"/>
-              </a:solidFill>
-              <a:effectLst/>
-              <a:uFillTx/>
-              <a:latin typeface="Calibri"/>
-            </a:endParaRPr>
           </a:p>
           <a:p>
             <a:pPr marL="1828800" lvl="4" indent="-216000" algn="l">
@@ -1709,14 +1685,6 @@
               </a:rPr>
               <a:t>Fifth Outline Level</a:t>
             </a:r>
-            <a:endParaRPr lang="en-GB" sz="2000" b="0" u="none" strike="noStrike">
-              <a:solidFill>
-                <a:srgbClr val="000000"/>
-              </a:solidFill>
-              <a:effectLst/>
-              <a:uFillTx/>
-              <a:latin typeface="Calibri"/>
-            </a:endParaRPr>
           </a:p>
           <a:p>
             <a:pPr marL="2286000" lvl="5" indent="-216000" algn="l">
@@ -1744,14 +1712,6 @@
               </a:rPr>
               <a:t>Sixth Outline Level</a:t>
             </a:r>
-            <a:endParaRPr lang="en-GB" sz="2000" b="0" u="none" strike="noStrike">
-              <a:solidFill>
-                <a:srgbClr val="000000"/>
-              </a:solidFill>
-              <a:effectLst/>
-              <a:uFillTx/>
-              <a:latin typeface="Calibri"/>
-            </a:endParaRPr>
           </a:p>
           <a:p>
             <a:pPr marL="2743200" lvl="6" indent="-216000" algn="l">
@@ -1779,14 +1739,6 @@
               </a:rPr>
               <a:t>Seventh Outline Level</a:t>
             </a:r>
-            <a:endParaRPr lang="en-GB" sz="2000" b="0" u="none" strike="noStrike">
-              <a:solidFill>
-                <a:srgbClr val="000000"/>
-              </a:solidFill>
-              <a:effectLst/>
-              <a:uFillTx/>
-              <a:latin typeface="Calibri"/>
-            </a:endParaRPr>
           </a:p>
         </p:txBody>
       </p:sp>
@@ -1999,14 +1951,6 @@
               </a:rPr>
               <a:t>Click to edit the outline text format</a:t>
             </a:r>
-            <a:endParaRPr lang="en-GB" sz="2000" b="0" u="none" strike="noStrike">
-              <a:solidFill>
-                <a:srgbClr val="000000"/>
-              </a:solidFill>
-              <a:effectLst/>
-              <a:uFillTx/>
-              <a:latin typeface="Calibri"/>
-            </a:endParaRPr>
           </a:p>
           <a:p>
             <a:pPr marL="457200" lvl="1" indent="-324000" algn="l">
@@ -2034,14 +1978,6 @@
               </a:rPr>
               <a:t>Second Outline Level</a:t>
             </a:r>
-            <a:endParaRPr lang="en-GB" sz="2000" b="0" u="none" strike="noStrike">
-              <a:solidFill>
-                <a:srgbClr val="000000"/>
-              </a:solidFill>
-              <a:effectLst/>
-              <a:uFillTx/>
-              <a:latin typeface="Calibri"/>
-            </a:endParaRPr>
           </a:p>
           <a:p>
             <a:pPr marL="914400" lvl="2" indent="-288000" algn="l">
@@ -2069,14 +2005,6 @@
               </a:rPr>
               <a:t>Third Outline Level</a:t>
             </a:r>
-            <a:endParaRPr lang="en-GB" sz="2000" b="0" u="none" strike="noStrike">
-              <a:solidFill>
-                <a:srgbClr val="000000"/>
-              </a:solidFill>
-              <a:effectLst/>
-              <a:uFillTx/>
-              <a:latin typeface="Calibri"/>
-            </a:endParaRPr>
           </a:p>
           <a:p>
             <a:pPr marL="1371600" lvl="3" indent="-216000" algn="l">
@@ -2104,14 +2032,6 @@
               </a:rPr>
               <a:t>Fourth Outline Level</a:t>
             </a:r>
-            <a:endParaRPr lang="en-GB" sz="2000" b="0" u="none" strike="noStrike">
-              <a:solidFill>
-                <a:srgbClr val="000000"/>
-              </a:solidFill>
-              <a:effectLst/>
-              <a:uFillTx/>
-              <a:latin typeface="Calibri"/>
-            </a:endParaRPr>
           </a:p>
           <a:p>
             <a:pPr marL="1828800" lvl="4" indent="-216000" algn="l">
@@ -2139,14 +2059,6 @@
               </a:rPr>
               <a:t>Fifth Outline Level</a:t>
             </a:r>
-            <a:endParaRPr lang="en-GB" sz="2000" b="0" u="none" strike="noStrike">
-              <a:solidFill>
-                <a:srgbClr val="000000"/>
-              </a:solidFill>
-              <a:effectLst/>
-              <a:uFillTx/>
-              <a:latin typeface="Calibri"/>
-            </a:endParaRPr>
           </a:p>
           <a:p>
             <a:pPr marL="2286000" lvl="5" indent="-216000" algn="l">
@@ -2174,14 +2086,6 @@
               </a:rPr>
               <a:t>Sixth Outline Level</a:t>
             </a:r>
-            <a:endParaRPr lang="en-GB" sz="2000" b="0" u="none" strike="noStrike">
-              <a:solidFill>
-                <a:srgbClr val="000000"/>
-              </a:solidFill>
-              <a:effectLst/>
-              <a:uFillTx/>
-              <a:latin typeface="Calibri"/>
-            </a:endParaRPr>
           </a:p>
           <a:p>
             <a:pPr marL="2743200" lvl="6" indent="-216000" algn="l">
@@ -2209,14 +2113,6 @@
               </a:rPr>
               <a:t>Seventh Outline Level</a:t>
             </a:r>
-            <a:endParaRPr lang="en-GB" sz="2000" b="0" u="none" strike="noStrike">
-              <a:solidFill>
-                <a:srgbClr val="000000"/>
-              </a:solidFill>
-              <a:effectLst/>
-              <a:uFillTx/>
-              <a:latin typeface="Calibri"/>
-            </a:endParaRPr>
           </a:p>
         </p:txBody>
       </p:sp>
@@ -2287,14 +2183,6 @@
               </a:rPr>
               <a:t> </a:t>
             </a:r>
-            <a:endParaRPr lang="en-GB" sz="1400" b="0" u="none" strike="noStrike">
-              <a:solidFill>
-                <a:srgbClr val="000000"/>
-              </a:solidFill>
-              <a:effectLst/>
-              <a:uFillTx/>
-              <a:latin typeface="Times New Roman"/>
-            </a:endParaRPr>
           </a:p>
         </p:txBody>
       </p:sp>
@@ -2448,7 +2336,7 @@
               <a:t>Partie</a:t>
             </a:r>
             <a:r>
-              <a:rPr lang="en-GB" sz="1000" b="1" u="none" spc="-45" strike="noStrike">
+              <a:rPr lang="en-GB" sz="1000" b="1" u="none" strike="noStrike" spc="-45">
                 <a:solidFill>
                   <a:schemeClr val="lt1"/>
                 </a:solidFill>
@@ -2459,7 +2347,7 @@
               <a:t> </a:t>
             </a:r>
             <a:fld id="{06E80D37-B2EC-4B64-82FE-474234C5054C}" type="slidenum">
-              <a:rPr lang="en-GB" sz="1000" b="1" u="none" spc="-51" strike="noStrike">
+              <a:rPr lang="en-GB" sz="1000" b="1" u="none" strike="noStrike" spc="-51">
                 <a:solidFill>
                   <a:schemeClr val="lt1"/>
                 </a:solidFill>
@@ -2467,7 +2355,7 @@
                 <a:uFillTx/>
                 <a:latin typeface="Arial"/>
               </a:rPr>
-              <a:t>7</a:t>
+              <a:t>‹N°›</a:t>
             </a:fld>
             <a:endParaRPr lang="en-GB" sz="1000" b="0" u="none" strike="noStrike">
               <a:solidFill>
@@ -2482,17 +2370,21 @@
       </p:sp>
     </p:spTree>
   </p:cSld>
+  <p:clrMapOvr>
+    <a:masterClrMapping/>
+  </p:clrMapOvr>
 </p:sldLayout>
 </file>
 
 <file path=ppt/slideLayouts/slideLayout4.xml><?xml version="1.0" encoding="utf-8"?>
-<p:sldLayout xmlns:a="http://schemas.openxmlformats.org/drawingml/2006/main" xmlns:p="http://schemas.openxmlformats.org/presentationml/2006/main" xmlns:r="http://schemas.openxmlformats.org/officeDocument/2006/relationships" xmlns:p14="http://schemas.microsoft.com/office/powerpoint/2010/main" xmlns:p15="http://schemas.microsoft.com/office/powerpoint/2012/main" xmlns:mc="http://schemas.openxmlformats.org/markup-compatibility/2006" type="obj" preserve="1">
+<p:sldLayout xmlns:a="http://schemas.openxmlformats.org/drawingml/2006/main" xmlns:r="http://schemas.openxmlformats.org/officeDocument/2006/relationships" xmlns:p="http://schemas.openxmlformats.org/presentationml/2006/main" type="obj" preserve="1">
   <p:cSld name="Title Only">
     <p:bg>
       <p:bgPr>
         <a:solidFill>
           <a:schemeClr val="lt1"/>
         </a:solidFill>
+        <a:effectLst/>
       </p:bgPr>
     </p:bg>
     <p:spTree>
@@ -2624,14 +2516,6 @@
               </a:rPr>
               <a:t>Click to edit the title text format</a:t>
             </a:r>
-            <a:endParaRPr lang="en-GB" sz="3200" b="0" u="none" strike="noStrike">
-              <a:solidFill>
-                <a:srgbClr val="000000"/>
-              </a:solidFill>
-              <a:effectLst/>
-              <a:uFillTx/>
-              <a:latin typeface="Calibri"/>
-            </a:endParaRPr>
           </a:p>
         </p:txBody>
       </p:sp>
@@ -2702,14 +2586,6 @@
               </a:rPr>
               <a:t> </a:t>
             </a:r>
-            <a:endParaRPr lang="en-GB" sz="1400" b="0" u="none" strike="noStrike">
-              <a:solidFill>
-                <a:srgbClr val="000000"/>
-              </a:solidFill>
-              <a:effectLst/>
-              <a:uFillTx/>
-              <a:latin typeface="Times New Roman"/>
-            </a:endParaRPr>
           </a:p>
         </p:txBody>
       </p:sp>
@@ -2863,7 +2739,7 @@
               <a:t>Partie</a:t>
             </a:r>
             <a:r>
-              <a:rPr lang="en-GB" sz="1000" b="1" u="none" spc="-45" strike="noStrike">
+              <a:rPr lang="en-GB" sz="1000" b="1" u="none" strike="noStrike" spc="-45">
                 <a:solidFill>
                   <a:schemeClr val="lt1"/>
                 </a:solidFill>
@@ -2874,7 +2750,7 @@
               <a:t> </a:t>
             </a:r>
             <a:fld id="{F6921F8F-AFD0-40B1-B8E3-A883B131A2EE}" type="slidenum">
-              <a:rPr lang="en-GB" sz="1000" b="1" u="none" spc="-51" strike="noStrike">
+              <a:rPr lang="en-GB" sz="1000" b="1" u="none" strike="noStrike" spc="-51">
                 <a:solidFill>
                   <a:schemeClr val="lt1"/>
                 </a:solidFill>
@@ -2882,7 +2758,7 @@
                 <a:uFillTx/>
                 <a:latin typeface="Arial"/>
               </a:rPr>
-              <a:t>7</a:t>
+              <a:t>‹N°›</a:t>
             </a:fld>
             <a:endParaRPr lang="en-GB" sz="1000" b="0" u="none" strike="noStrike">
               <a:solidFill>
@@ -3104,14 +2980,6 @@
               </a:rPr>
               <a:t>Click to edit the outline text format</a:t>
             </a:r>
-            <a:endParaRPr lang="en-GB" sz="1800" b="0" u="none" strike="noStrike">
-              <a:solidFill>
-                <a:srgbClr val="000000"/>
-              </a:solidFill>
-              <a:effectLst/>
-              <a:uFillTx/>
-              <a:latin typeface="Calibri"/>
-            </a:endParaRPr>
           </a:p>
           <a:p>
             <a:pPr marL="864000" lvl="1" indent="-324000" algn="l">
@@ -3139,14 +3007,6 @@
               </a:rPr>
               <a:t>Second Outline Level</a:t>
             </a:r>
-            <a:endParaRPr lang="en-GB" sz="1800" b="0" u="none" strike="noStrike">
-              <a:solidFill>
-                <a:srgbClr val="000000"/>
-              </a:solidFill>
-              <a:effectLst/>
-              <a:uFillTx/>
-              <a:latin typeface="Calibri"/>
-            </a:endParaRPr>
           </a:p>
           <a:p>
             <a:pPr marL="1296000" lvl="2" indent="-288000" algn="l">
@@ -3174,14 +3034,6 @@
               </a:rPr>
               <a:t>Third Outline Level</a:t>
             </a:r>
-            <a:endParaRPr lang="en-GB" sz="1800" b="0" u="none" strike="noStrike">
-              <a:solidFill>
-                <a:srgbClr val="000000"/>
-              </a:solidFill>
-              <a:effectLst/>
-              <a:uFillTx/>
-              <a:latin typeface="Calibri"/>
-            </a:endParaRPr>
           </a:p>
           <a:p>
             <a:pPr marL="1728000" lvl="3" indent="-216000" algn="l">
@@ -3209,14 +3061,6 @@
               </a:rPr>
               <a:t>Fourth Outline Level</a:t>
             </a:r>
-            <a:endParaRPr lang="en-GB" sz="1800" b="0" u="none" strike="noStrike">
-              <a:solidFill>
-                <a:srgbClr val="000000"/>
-              </a:solidFill>
-              <a:effectLst/>
-              <a:uFillTx/>
-              <a:latin typeface="Calibri"/>
-            </a:endParaRPr>
           </a:p>
           <a:p>
             <a:pPr marL="2160000" lvl="4" indent="-216000" algn="l">
@@ -3244,14 +3088,6 @@
               </a:rPr>
               <a:t>Fifth Outline Level</a:t>
             </a:r>
-            <a:endParaRPr lang="en-GB" sz="2000" b="0" u="none" strike="noStrike">
-              <a:solidFill>
-                <a:srgbClr val="000000"/>
-              </a:solidFill>
-              <a:effectLst/>
-              <a:uFillTx/>
-              <a:latin typeface="Calibri"/>
-            </a:endParaRPr>
           </a:p>
           <a:p>
             <a:pPr marL="2592000" lvl="5" indent="-216000" algn="l">
@@ -3279,14 +3115,6 @@
               </a:rPr>
               <a:t>Sixth Outline Level</a:t>
             </a:r>
-            <a:endParaRPr lang="en-GB" sz="2000" b="0" u="none" strike="noStrike">
-              <a:solidFill>
-                <a:srgbClr val="000000"/>
-              </a:solidFill>
-              <a:effectLst/>
-              <a:uFillTx/>
-              <a:latin typeface="Calibri"/>
-            </a:endParaRPr>
           </a:p>
           <a:p>
             <a:pPr marL="3024000" lvl="6" indent="-216000" algn="l">
@@ -3314,30 +3142,26 @@
               </a:rPr>
               <a:t>Seventh Outline Level</a:t>
             </a:r>
-            <a:endParaRPr lang="en-GB" sz="2000" b="0" u="none" strike="noStrike">
-              <a:solidFill>
-                <a:srgbClr val="000000"/>
-              </a:solidFill>
-              <a:effectLst/>
-              <a:uFillTx/>
-              <a:latin typeface="Calibri"/>
-            </a:endParaRPr>
           </a:p>
         </p:txBody>
       </p:sp>
     </p:spTree>
   </p:cSld>
+  <p:clrMapOvr>
+    <a:masterClrMapping/>
+  </p:clrMapOvr>
 </p:sldLayout>
 </file>
 
 <file path=ppt/slideLayouts/slideLayout5.xml><?xml version="1.0" encoding="utf-8"?>
-<p:sldLayout xmlns:a="http://schemas.openxmlformats.org/drawingml/2006/main" xmlns:p="http://schemas.openxmlformats.org/presentationml/2006/main" xmlns:r="http://schemas.openxmlformats.org/officeDocument/2006/relationships" xmlns:p14="http://schemas.microsoft.com/office/powerpoint/2010/main" xmlns:p15="http://schemas.microsoft.com/office/powerpoint/2012/main" xmlns:mc="http://schemas.openxmlformats.org/markup-compatibility/2006" type="obj" preserve="1">
+<p:sldLayout xmlns:a="http://schemas.openxmlformats.org/drawingml/2006/main" xmlns:r="http://schemas.openxmlformats.org/officeDocument/2006/relationships" xmlns:p="http://schemas.openxmlformats.org/presentationml/2006/main" type="obj" preserve="1">
   <p:cSld name="Blank">
     <p:bg>
       <p:bgPr>
         <a:solidFill>
           <a:schemeClr val="lt1"/>
         </a:solidFill>
+        <a:effectLst/>
       </p:bgPr>
     </p:bg>
     <p:spTree>
@@ -3445,14 +3269,6 @@
               </a:rPr>
               <a:t>&lt;footer&gt;</a:t>
             </a:r>
-            <a:endParaRPr lang="en-GB" sz="1400" b="0" u="none" strike="noStrike">
-              <a:solidFill>
-                <a:srgbClr val="000000"/>
-              </a:solidFill>
-              <a:effectLst/>
-              <a:uFillTx/>
-              <a:latin typeface="Times New Roman"/>
-            </a:endParaRPr>
           </a:p>
         </p:txBody>
       </p:sp>
@@ -3606,7 +3422,7 @@
               <a:t>Partie</a:t>
             </a:r>
             <a:r>
-              <a:rPr lang="en-GB" sz="1000" b="1" u="none" spc="-45" strike="noStrike">
+              <a:rPr lang="en-GB" sz="1000" b="1" u="none" strike="noStrike" spc="-45">
                 <a:solidFill>
                   <a:schemeClr val="lt1"/>
                 </a:solidFill>
@@ -3617,7 +3433,7 @@
               <a:t> </a:t>
             </a:r>
             <a:fld id="{977FF422-3C96-4F96-A8CC-9294B464D5F2}" type="slidenum">
-              <a:rPr lang="en-GB" sz="1000" b="1" u="none" spc="-51" strike="noStrike">
+              <a:rPr lang="en-GB" sz="1000" b="1" u="none" strike="noStrike" spc="-51">
                 <a:solidFill>
                   <a:schemeClr val="lt1"/>
                 </a:solidFill>
@@ -3625,7 +3441,7 @@
                 <a:uFillTx/>
                 <a:latin typeface="Arial"/>
               </a:rPr>
-              <a:t>&lt;number&gt;</a:t>
+              <a:t>‹N°›</a:t>
             </a:fld>
             <a:endParaRPr lang="en-GB" sz="1000" b="0" u="none" strike="noStrike">
               <a:solidFill>
@@ -3640,12 +3456,20 @@
       </p:sp>
     </p:spTree>
   </p:cSld>
+  <p:clrMapOvr>
+    <a:masterClrMapping/>
+  </p:clrMapOvr>
 </p:sldLayout>
 </file>
 
 <file path=ppt/slideMasters/slideMaster1.xml><?xml version="1.0" encoding="utf-8"?>
-<p:sldMaster xmlns:a="http://schemas.openxmlformats.org/drawingml/2006/main" xmlns:p="http://schemas.openxmlformats.org/presentationml/2006/main" xmlns:r="http://schemas.openxmlformats.org/officeDocument/2006/relationships" xmlns:p14="http://schemas.microsoft.com/office/powerpoint/2010/main" xmlns:p15="http://schemas.microsoft.com/office/powerpoint/2012/main" xmlns:mc="http://schemas.openxmlformats.org/markup-compatibility/2006">
+<p:sldMaster xmlns:a="http://schemas.openxmlformats.org/drawingml/2006/main" xmlns:r="http://schemas.openxmlformats.org/officeDocument/2006/relationships" xmlns:p="http://schemas.openxmlformats.org/presentationml/2006/main">
   <p:cSld>
+    <p:bg>
+      <p:bgRef idx="1001">
+        <a:schemeClr val="bg1"/>
+      </p:bgRef>
+    </p:bg>
     <p:spTree>
       <p:nvGrpSpPr>
         <p:cNvPr id="1" name=""/>
@@ -3664,17 +3488,297 @@
   </p:cSld>
   <p:clrMap bg1="lt1" tx1="dk1" bg2="lt2" tx2="dk2" accent1="accent1" accent2="accent2" accent3="accent3" accent4="accent4" accent5="accent5" accent6="accent6" hlink="hlink" folHlink="folHlink"/>
   <p:sldLayoutIdLst>
-    <p:sldLayoutId id="2147483649" r:id="rId2"/>
-    <p:sldLayoutId id="2147483650" r:id="rId3"/>
-    <p:sldLayoutId id="2147483651" r:id="rId4"/>
-    <p:sldLayoutId id="2147483652" r:id="rId5"/>
-    <p:sldLayoutId id="2147483653" r:id="rId6"/>
+    <p:sldLayoutId id="2147483649" r:id="rId1"/>
+    <p:sldLayoutId id="2147483650" r:id="rId2"/>
+    <p:sldLayoutId id="2147483651" r:id="rId3"/>
+    <p:sldLayoutId id="2147483652" r:id="rId4"/>
+    <p:sldLayoutId id="2147483653" r:id="rId5"/>
   </p:sldLayoutIdLst>
+  <p:txStyles>
+    <p:titleStyle>
+      <a:lvl1pPr algn="l" defTabSz="914400" rtl="0" eaLnBrk="1" latinLnBrk="0" hangingPunct="1">
+        <a:lnSpc>
+          <a:spcPct val="90000"/>
+        </a:lnSpc>
+        <a:spcBef>
+          <a:spcPct val="0"/>
+        </a:spcBef>
+        <a:buNone/>
+        <a:defRPr sz="4400" kern="1200">
+          <a:solidFill>
+            <a:schemeClr val="tx1"/>
+          </a:solidFill>
+          <a:latin typeface="+mj-lt"/>
+          <a:ea typeface="+mj-ea"/>
+          <a:cs typeface="+mj-cs"/>
+        </a:defRPr>
+      </a:lvl1pPr>
+    </p:titleStyle>
+    <p:bodyStyle>
+      <a:lvl1pPr marL="228600" indent="-228600" algn="l" defTabSz="914400" rtl="0" eaLnBrk="1" latinLnBrk="0" hangingPunct="1">
+        <a:lnSpc>
+          <a:spcPct val="90000"/>
+        </a:lnSpc>
+        <a:spcBef>
+          <a:spcPts val="1000"/>
+        </a:spcBef>
+        <a:buFont typeface="Arial" panose="020B0604020202020204" pitchFamily="34" charset="0"/>
+        <a:buChar char="•"/>
+        <a:defRPr sz="2800" kern="1200">
+          <a:solidFill>
+            <a:schemeClr val="tx1"/>
+          </a:solidFill>
+          <a:latin typeface="+mn-lt"/>
+          <a:ea typeface="+mn-ea"/>
+          <a:cs typeface="+mn-cs"/>
+        </a:defRPr>
+      </a:lvl1pPr>
+      <a:lvl2pPr marL="685800" indent="-228600" algn="l" defTabSz="914400" rtl="0" eaLnBrk="1" latinLnBrk="0" hangingPunct="1">
+        <a:lnSpc>
+          <a:spcPct val="90000"/>
+        </a:lnSpc>
+        <a:spcBef>
+          <a:spcPts val="500"/>
+        </a:spcBef>
+        <a:buFont typeface="Arial" panose="020B0604020202020204" pitchFamily="34" charset="0"/>
+        <a:buChar char="•"/>
+        <a:defRPr sz="2400" kern="1200">
+          <a:solidFill>
+            <a:schemeClr val="tx1"/>
+          </a:solidFill>
+          <a:latin typeface="+mn-lt"/>
+          <a:ea typeface="+mn-ea"/>
+          <a:cs typeface="+mn-cs"/>
+        </a:defRPr>
+      </a:lvl2pPr>
+      <a:lvl3pPr marL="1143000" indent="-228600" algn="l" defTabSz="914400" rtl="0" eaLnBrk="1" latinLnBrk="0" hangingPunct="1">
+        <a:lnSpc>
+          <a:spcPct val="90000"/>
+        </a:lnSpc>
+        <a:spcBef>
+          <a:spcPts val="500"/>
+        </a:spcBef>
+        <a:buFont typeface="Arial" panose="020B0604020202020204" pitchFamily="34" charset="0"/>
+        <a:buChar char="•"/>
+        <a:defRPr sz="2000" kern="1200">
+          <a:solidFill>
+            <a:schemeClr val="tx1"/>
+          </a:solidFill>
+          <a:latin typeface="+mn-lt"/>
+          <a:ea typeface="+mn-ea"/>
+          <a:cs typeface="+mn-cs"/>
+        </a:defRPr>
+      </a:lvl3pPr>
+      <a:lvl4pPr marL="1600200" indent="-228600" algn="l" defTabSz="914400" rtl="0" eaLnBrk="1" latinLnBrk="0" hangingPunct="1">
+        <a:lnSpc>
+          <a:spcPct val="90000"/>
+        </a:lnSpc>
+        <a:spcBef>
+          <a:spcPts val="500"/>
+        </a:spcBef>
+        <a:buFont typeface="Arial" panose="020B0604020202020204" pitchFamily="34" charset="0"/>
+        <a:buChar char="•"/>
+        <a:defRPr sz="1800" kern="1200">
+          <a:solidFill>
+            <a:schemeClr val="tx1"/>
+          </a:solidFill>
+          <a:latin typeface="+mn-lt"/>
+          <a:ea typeface="+mn-ea"/>
+          <a:cs typeface="+mn-cs"/>
+        </a:defRPr>
+      </a:lvl4pPr>
+      <a:lvl5pPr marL="2057400" indent="-228600" algn="l" defTabSz="914400" rtl="0" eaLnBrk="1" latinLnBrk="0" hangingPunct="1">
+        <a:lnSpc>
+          <a:spcPct val="90000"/>
+        </a:lnSpc>
+        <a:spcBef>
+          <a:spcPts val="500"/>
+        </a:spcBef>
+        <a:buFont typeface="Arial" panose="020B0604020202020204" pitchFamily="34" charset="0"/>
+        <a:buChar char="•"/>
+        <a:defRPr sz="1800" kern="1200">
+          <a:solidFill>
+            <a:schemeClr val="tx1"/>
+          </a:solidFill>
+          <a:latin typeface="+mn-lt"/>
+          <a:ea typeface="+mn-ea"/>
+          <a:cs typeface="+mn-cs"/>
+        </a:defRPr>
+      </a:lvl5pPr>
+      <a:lvl6pPr marL="2514600" indent="-228600" algn="l" defTabSz="914400" rtl="0" eaLnBrk="1" latinLnBrk="0" hangingPunct="1">
+        <a:lnSpc>
+          <a:spcPct val="90000"/>
+        </a:lnSpc>
+        <a:spcBef>
+          <a:spcPts val="500"/>
+        </a:spcBef>
+        <a:buFont typeface="Arial" panose="020B0604020202020204" pitchFamily="34" charset="0"/>
+        <a:buChar char="•"/>
+        <a:defRPr sz="1800" kern="1200">
+          <a:solidFill>
+            <a:schemeClr val="tx1"/>
+          </a:solidFill>
+          <a:latin typeface="+mn-lt"/>
+          <a:ea typeface="+mn-ea"/>
+          <a:cs typeface="+mn-cs"/>
+        </a:defRPr>
+      </a:lvl6pPr>
+      <a:lvl7pPr marL="2971800" indent="-228600" algn="l" defTabSz="914400" rtl="0" eaLnBrk="1" latinLnBrk="0" hangingPunct="1">
+        <a:lnSpc>
+          <a:spcPct val="90000"/>
+        </a:lnSpc>
+        <a:spcBef>
+          <a:spcPts val="500"/>
+        </a:spcBef>
+        <a:buFont typeface="Arial" panose="020B0604020202020204" pitchFamily="34" charset="0"/>
+        <a:buChar char="•"/>
+        <a:defRPr sz="1800" kern="1200">
+          <a:solidFill>
+            <a:schemeClr val="tx1"/>
+          </a:solidFill>
+          <a:latin typeface="+mn-lt"/>
+          <a:ea typeface="+mn-ea"/>
+          <a:cs typeface="+mn-cs"/>
+        </a:defRPr>
+      </a:lvl7pPr>
+      <a:lvl8pPr marL="3429000" indent="-228600" algn="l" defTabSz="914400" rtl="0" eaLnBrk="1" latinLnBrk="0" hangingPunct="1">
+        <a:lnSpc>
+          <a:spcPct val="90000"/>
+        </a:lnSpc>
+        <a:spcBef>
+          <a:spcPts val="500"/>
+        </a:spcBef>
+        <a:buFont typeface="Arial" panose="020B0604020202020204" pitchFamily="34" charset="0"/>
+        <a:buChar char="•"/>
+        <a:defRPr sz="1800" kern="1200">
+          <a:solidFill>
+            <a:schemeClr val="tx1"/>
+          </a:solidFill>
+          <a:latin typeface="+mn-lt"/>
+          <a:ea typeface="+mn-ea"/>
+          <a:cs typeface="+mn-cs"/>
+        </a:defRPr>
+      </a:lvl8pPr>
+      <a:lvl9pPr marL="3886200" indent="-228600" algn="l" defTabSz="914400" rtl="0" eaLnBrk="1" latinLnBrk="0" hangingPunct="1">
+        <a:lnSpc>
+          <a:spcPct val="90000"/>
+        </a:lnSpc>
+        <a:spcBef>
+          <a:spcPts val="500"/>
+        </a:spcBef>
+        <a:buFont typeface="Arial" panose="020B0604020202020204" pitchFamily="34" charset="0"/>
+        <a:buChar char="•"/>
+        <a:defRPr sz="1800" kern="1200">
+          <a:solidFill>
+            <a:schemeClr val="tx1"/>
+          </a:solidFill>
+          <a:latin typeface="+mn-lt"/>
+          <a:ea typeface="+mn-ea"/>
+          <a:cs typeface="+mn-cs"/>
+        </a:defRPr>
+      </a:lvl9pPr>
+    </p:bodyStyle>
+    <p:otherStyle>
+      <a:defPPr>
+        <a:defRPr lang="fr-FR"/>
+      </a:defPPr>
+      <a:lvl1pPr marL="0" algn="l" defTabSz="914400" rtl="0" eaLnBrk="1" latinLnBrk="0" hangingPunct="1">
+        <a:defRPr sz="1800" kern="1200">
+          <a:solidFill>
+            <a:schemeClr val="tx1"/>
+          </a:solidFill>
+          <a:latin typeface="+mn-lt"/>
+          <a:ea typeface="+mn-ea"/>
+          <a:cs typeface="+mn-cs"/>
+        </a:defRPr>
+      </a:lvl1pPr>
+      <a:lvl2pPr marL="457200" algn="l" defTabSz="914400" rtl="0" eaLnBrk="1" latinLnBrk="0" hangingPunct="1">
+        <a:defRPr sz="1800" kern="1200">
+          <a:solidFill>
+            <a:schemeClr val="tx1"/>
+          </a:solidFill>
+          <a:latin typeface="+mn-lt"/>
+          <a:ea typeface="+mn-ea"/>
+          <a:cs typeface="+mn-cs"/>
+        </a:defRPr>
+      </a:lvl2pPr>
+      <a:lvl3pPr marL="914400" algn="l" defTabSz="914400" rtl="0" eaLnBrk="1" latinLnBrk="0" hangingPunct="1">
+        <a:defRPr sz="1800" kern="1200">
+          <a:solidFill>
+            <a:schemeClr val="tx1"/>
+          </a:solidFill>
+          <a:latin typeface="+mn-lt"/>
+          <a:ea typeface="+mn-ea"/>
+          <a:cs typeface="+mn-cs"/>
+        </a:defRPr>
+      </a:lvl3pPr>
+      <a:lvl4pPr marL="1371600" algn="l" defTabSz="914400" rtl="0" eaLnBrk="1" latinLnBrk="0" hangingPunct="1">
+        <a:defRPr sz="1800" kern="1200">
+          <a:solidFill>
+            <a:schemeClr val="tx1"/>
+          </a:solidFill>
+          <a:latin typeface="+mn-lt"/>
+          <a:ea typeface="+mn-ea"/>
+          <a:cs typeface="+mn-cs"/>
+        </a:defRPr>
+      </a:lvl4pPr>
+      <a:lvl5pPr marL="1828800" algn="l" defTabSz="914400" rtl="0" eaLnBrk="1" latinLnBrk="0" hangingPunct="1">
+        <a:defRPr sz="1800" kern="1200">
+          <a:solidFill>
+            <a:schemeClr val="tx1"/>
+          </a:solidFill>
+          <a:latin typeface="+mn-lt"/>
+          <a:ea typeface="+mn-ea"/>
+          <a:cs typeface="+mn-cs"/>
+        </a:defRPr>
+      </a:lvl5pPr>
+      <a:lvl6pPr marL="2286000" algn="l" defTabSz="914400" rtl="0" eaLnBrk="1" latinLnBrk="0" hangingPunct="1">
+        <a:defRPr sz="1800" kern="1200">
+          <a:solidFill>
+            <a:schemeClr val="tx1"/>
+          </a:solidFill>
+          <a:latin typeface="+mn-lt"/>
+          <a:ea typeface="+mn-ea"/>
+          <a:cs typeface="+mn-cs"/>
+        </a:defRPr>
+      </a:lvl6pPr>
+      <a:lvl7pPr marL="2743200" algn="l" defTabSz="914400" rtl="0" eaLnBrk="1" latinLnBrk="0" hangingPunct="1">
+        <a:defRPr sz="1800" kern="1200">
+          <a:solidFill>
+            <a:schemeClr val="tx1"/>
+          </a:solidFill>
+          <a:latin typeface="+mn-lt"/>
+          <a:ea typeface="+mn-ea"/>
+          <a:cs typeface="+mn-cs"/>
+        </a:defRPr>
+      </a:lvl7pPr>
+      <a:lvl8pPr marL="3200400" algn="l" defTabSz="914400" rtl="0" eaLnBrk="1" latinLnBrk="0" hangingPunct="1">
+        <a:defRPr sz="1800" kern="1200">
+          <a:solidFill>
+            <a:schemeClr val="tx1"/>
+          </a:solidFill>
+          <a:latin typeface="+mn-lt"/>
+          <a:ea typeface="+mn-ea"/>
+          <a:cs typeface="+mn-cs"/>
+        </a:defRPr>
+      </a:lvl8pPr>
+      <a:lvl9pPr marL="3657600" algn="l" defTabSz="914400" rtl="0" eaLnBrk="1" latinLnBrk="0" hangingPunct="1">
+        <a:defRPr sz="1800" kern="1200">
+          <a:solidFill>
+            <a:schemeClr val="tx1"/>
+          </a:solidFill>
+          <a:latin typeface="+mn-lt"/>
+          <a:ea typeface="+mn-ea"/>
+          <a:cs typeface="+mn-cs"/>
+        </a:defRPr>
+      </a:lvl9pPr>
+    </p:otherStyle>
+  </p:txStyles>
 </p:sldMaster>
 </file>
 
 <file path=ppt/slides/slide1.xml><?xml version="1.0" encoding="utf-8"?>
-<p:sld xmlns:a="http://schemas.openxmlformats.org/drawingml/2006/main" xmlns:p="http://schemas.openxmlformats.org/presentationml/2006/main" xmlns:r="http://schemas.openxmlformats.org/officeDocument/2006/relationships" xmlns:p14="http://schemas.microsoft.com/office/powerpoint/2010/main" xmlns:p15="http://schemas.microsoft.com/office/powerpoint/2012/main" xmlns:mc="http://schemas.openxmlformats.org/markup-compatibility/2006">
+<p:sld xmlns:a="http://schemas.openxmlformats.org/drawingml/2006/main" xmlns:r="http://schemas.openxmlformats.org/officeDocument/2006/relationships" xmlns:p="http://schemas.openxmlformats.org/presentationml/2006/main">
   <p:cSld>
     <p:spTree>
       <p:nvGrpSpPr>
@@ -3710,15 +3814,22 @@
           </a:ln>
         </p:spPr>
         <p:style>
-          <a:lnRef idx="0"/>
-          <a:fillRef idx="0"/>
-          <a:effectRef idx="0"/>
+          <a:lnRef idx="0">
+            <a:scrgbClr r="0" g="0" b="0"/>
+          </a:lnRef>
+          <a:fillRef idx="0">
+            <a:scrgbClr r="0" g="0" b="0"/>
+          </a:fillRef>
+          <a:effectRef idx="0">
+            <a:scrgbClr r="0" g="0" b="0"/>
+          </a:effectRef>
           <a:fontRef idx="minor"/>
         </p:style>
         <p:txBody>
           <a:bodyPr wrap="none" lIns="90000" tIns="45000" rIns="90000" bIns="45000" anchor="t">
             <a:spAutoFit/>
           </a:bodyPr>
+          <a:lstStyle/>
           <a:p>
             <a:pPr>
               <a:lnSpc>
@@ -3767,15 +3878,22 @@
           </a:ln>
         </p:spPr>
         <p:style>
-          <a:lnRef idx="0"/>
-          <a:fillRef idx="0"/>
-          <a:effectRef idx="0"/>
+          <a:lnRef idx="0">
+            <a:scrgbClr r="0" g="0" b="0"/>
+          </a:lnRef>
+          <a:fillRef idx="0">
+            <a:scrgbClr r="0" g="0" b="0"/>
+          </a:fillRef>
+          <a:effectRef idx="0">
+            <a:scrgbClr r="0" g="0" b="0"/>
+          </a:effectRef>
           <a:fontRef idx="minor"/>
         </p:style>
         <p:txBody>
           <a:bodyPr wrap="none" lIns="90000" tIns="45000" rIns="90000" bIns="45000" anchor="t">
             <a:spAutoFit/>
           </a:bodyPr>
+          <a:lstStyle/>
           <a:p>
             <a:pPr>
               <a:lnSpc>
@@ -3783,6 +3901,58 @@
               </a:lnSpc>
             </a:pPr>
             <a:r>
+              <a:rPr lang="fr-FR" sz="1800" b="0" u="none" strike="noStrike" dirty="0">
+                <a:solidFill>
+                  <a:srgbClr val="000000"/>
+                </a:solidFill>
+                <a:effectLst/>
+                <a:uFillTx/>
+                <a:latin typeface="Arial"/>
+              </a:rPr>
+              <a:t>Philippe DE OLIVEIRA COSTA</a:t>
+            </a:r>
+            <a:endParaRPr lang="en-GB" sz="1800" b="0" u="none" strike="noStrike" dirty="0">
+              <a:solidFill>
+                <a:srgbClr val="000000"/>
+              </a:solidFill>
+              <a:effectLst/>
+              <a:uFillTx/>
+              <a:latin typeface="Arial"/>
+            </a:endParaRPr>
+          </a:p>
+          <a:p>
+            <a:pPr>
+              <a:lnSpc>
+                <a:spcPct val="100000"/>
+              </a:lnSpc>
+            </a:pPr>
+            <a:r>
+              <a:rPr lang="fr-FR" sz="1800" b="0" u="none" strike="noStrike" dirty="0">
+                <a:solidFill>
+                  <a:srgbClr val="000000"/>
+                </a:solidFill>
+                <a:effectLst/>
+                <a:uFillTx/>
+                <a:latin typeface="Arial"/>
+              </a:rPr>
+              <a:t>Nicolas DOBOSZ</a:t>
+            </a:r>
+            <a:endParaRPr lang="en-GB" sz="1800" b="0" u="none" strike="noStrike" dirty="0">
+              <a:solidFill>
+                <a:srgbClr val="000000"/>
+              </a:solidFill>
+              <a:effectLst/>
+              <a:uFillTx/>
+              <a:latin typeface="Arial"/>
+            </a:endParaRPr>
+          </a:p>
+          <a:p>
+            <a:pPr>
+              <a:lnSpc>
+                <a:spcPct val="100000"/>
+              </a:lnSpc>
+            </a:pPr>
+            <a:r>
               <a:rPr lang="fr-FR" sz="1800" b="0" u="none" strike="noStrike">
                 <a:solidFill>
                   <a:srgbClr val="000000"/>
@@ -3791,61 +3961,9 @@
                 <a:uFillTx/>
                 <a:latin typeface="Arial"/>
               </a:rPr>
-              <a:t>Philippe DE OLIVEIRA COSTA</a:t>
-            </a:r>
-            <a:endParaRPr lang="en-GB" sz="1800" b="0" u="none" strike="noStrike">
-              <a:solidFill>
-                <a:srgbClr val="000000"/>
-              </a:solidFill>
-              <a:effectLst/>
-              <a:uFillTx/>
-              <a:latin typeface="Arial"/>
-            </a:endParaRPr>
-          </a:p>
-          <a:p>
-            <a:pPr>
-              <a:lnSpc>
-                <a:spcPct val="100000"/>
-              </a:lnSpc>
-            </a:pPr>
-            <a:r>
-              <a:rPr lang="fr-FR" sz="1800" b="0" u="none" strike="noStrike">
-                <a:solidFill>
-                  <a:srgbClr val="000000"/>
-                </a:solidFill>
-                <a:effectLst/>
-                <a:uFillTx/>
-                <a:latin typeface="Arial"/>
-              </a:rPr>
-              <a:t>Nicolas DOBOSZ</a:t>
-            </a:r>
-            <a:endParaRPr lang="en-GB" sz="1800" b="0" u="none" strike="noStrike">
-              <a:solidFill>
-                <a:srgbClr val="000000"/>
-              </a:solidFill>
-              <a:effectLst/>
-              <a:uFillTx/>
-              <a:latin typeface="Arial"/>
-            </a:endParaRPr>
-          </a:p>
-          <a:p>
-            <a:pPr>
-              <a:lnSpc>
-                <a:spcPct val="100000"/>
-              </a:lnSpc>
-            </a:pPr>
-            <a:r>
-              <a:rPr lang="fr-FR" sz="1800" b="0" u="none" strike="noStrike">
-                <a:solidFill>
-                  <a:srgbClr val="000000"/>
-                </a:solidFill>
-                <a:effectLst/>
-                <a:uFillTx/>
-                <a:latin typeface="Arial"/>
-              </a:rPr>
-              <a:t>Yoann </a:t>
-            </a:r>
-            <a:endParaRPr lang="en-GB" sz="1800" b="0" u="none" strike="noStrike">
+              <a:t>Yohan Dechamps</a:t>
+            </a:r>
+            <a:endParaRPr lang="en-GB" sz="1800" b="0" u="none" strike="noStrike" dirty="0">
               <a:solidFill>
                 <a:srgbClr val="000000"/>
               </a:solidFill>
@@ -3858,19 +3976,14 @@
       </p:sp>
     </p:spTree>
   </p:cSld>
-  <mc:AlternateContent>
-    <mc:Choice Requires="p14">
-      <p:transition spd="slow" p14:dur="2000"/>
-    </mc:Choice>
-    <mc:Fallback>
-      <p:transition spd="slow"/>
-    </mc:Fallback>
-  </mc:AlternateContent>
+  <p:clrMapOvr>
+    <a:masterClrMapping/>
+  </p:clrMapOvr>
 </p:sld>
 </file>
 
 <file path=ppt/slides/slide10.xml><?xml version="1.0" encoding="utf-8"?>
-<p:sld xmlns:a="http://schemas.openxmlformats.org/drawingml/2006/main" xmlns:p="http://schemas.openxmlformats.org/presentationml/2006/main" xmlns:r="http://schemas.openxmlformats.org/officeDocument/2006/relationships" xmlns:p14="http://schemas.microsoft.com/office/powerpoint/2010/main" xmlns:p15="http://schemas.microsoft.com/office/powerpoint/2012/main" xmlns:mc="http://schemas.openxmlformats.org/markup-compatibility/2006">
+<p:sld xmlns:a="http://schemas.openxmlformats.org/drawingml/2006/main" xmlns:r="http://schemas.openxmlformats.org/officeDocument/2006/relationships" xmlns:p="http://schemas.openxmlformats.org/presentationml/2006/main">
   <p:cSld>
     <p:spTree>
       <p:nvGrpSpPr>
@@ -3913,6 +4026,7 @@
           <a:bodyPr lIns="0" tIns="140400" rIns="0" bIns="0" anchor="t">
             <a:spAutoFit/>
           </a:bodyPr>
+          <a:lstStyle/>
           <a:p>
             <a:pPr marL="12600" indent="0" algn="ctr">
               <a:lnSpc>
@@ -3968,15 +4082,22 @@
           </a:ln>
         </p:spPr>
         <p:style>
-          <a:lnRef idx="0"/>
-          <a:fillRef idx="0"/>
-          <a:effectRef idx="0"/>
+          <a:lnRef idx="0">
+            <a:scrgbClr r="0" g="0" b="0"/>
+          </a:lnRef>
+          <a:fillRef idx="0">
+            <a:scrgbClr r="0" g="0" b="0"/>
+          </a:fillRef>
+          <a:effectRef idx="0">
+            <a:scrgbClr r="0" g="0" b="0"/>
+          </a:effectRef>
           <a:fontRef idx="minor"/>
         </p:style>
         <p:txBody>
           <a:bodyPr lIns="90000" tIns="45000" rIns="90000" bIns="45000" anchor="t">
             <a:spAutoFit/>
           </a:bodyPr>
+          <a:lstStyle/>
           <a:p>
             <a:pPr marL="285840" indent="-285840">
               <a:lnSpc>
@@ -4199,7 +4320,7 @@
           <p:nvPr/>
         </p:nvPicPr>
         <p:blipFill>
-          <a:blip r:embed="rId1"/>
+          <a:blip r:embed="rId2"/>
           <a:stretch/>
         </p:blipFill>
         <p:spPr>
@@ -4237,6 +4358,7 @@
         </p:spPr>
         <p:txBody>
           <a:bodyPr lIns="0" tIns="0" rIns="0" bIns="0" anchor="t"/>
+          <a:lstStyle/>
           <a:p>
             <a:pPr algn="ctr">
               <a:buNone/>
@@ -4257,19 +4379,14 @@
       </p:sp>
     </p:spTree>
   </p:cSld>
-  <mc:AlternateContent>
-    <mc:Choice Requires="p14">
-      <p:transition spd="slow" p14:dur="2000"/>
-    </mc:Choice>
-    <mc:Fallback>
-      <p:transition spd="slow"/>
-    </mc:Fallback>
-  </mc:AlternateContent>
+  <p:clrMapOvr>
+    <a:masterClrMapping/>
+  </p:clrMapOvr>
 </p:sld>
 </file>
 
 <file path=ppt/slides/slide11.xml><?xml version="1.0" encoding="utf-8"?>
-<p:sld xmlns:a="http://schemas.openxmlformats.org/drawingml/2006/main" xmlns:p="http://schemas.openxmlformats.org/presentationml/2006/main" xmlns:r="http://schemas.openxmlformats.org/officeDocument/2006/relationships" xmlns:p14="http://schemas.microsoft.com/office/powerpoint/2010/main" xmlns:p15="http://schemas.microsoft.com/office/powerpoint/2012/main" xmlns:mc="http://schemas.openxmlformats.org/markup-compatibility/2006">
+<p:sld xmlns:a="http://schemas.openxmlformats.org/drawingml/2006/main" xmlns:r="http://schemas.openxmlformats.org/officeDocument/2006/relationships" xmlns:p="http://schemas.openxmlformats.org/presentationml/2006/main">
   <p:cSld>
     <p:spTree>
       <p:nvGrpSpPr>
@@ -4312,6 +4429,7 @@
           <a:bodyPr lIns="0" tIns="140400" rIns="0" bIns="0" anchor="t">
             <a:spAutoFit/>
           </a:bodyPr>
+          <a:lstStyle/>
           <a:p>
             <a:pPr marL="12600" indent="0" algn="ctr">
               <a:lnSpc>
@@ -4367,15 +4485,22 @@
           </a:ln>
         </p:spPr>
         <p:style>
-          <a:lnRef idx="0"/>
-          <a:fillRef idx="0"/>
-          <a:effectRef idx="0"/>
+          <a:lnRef idx="0">
+            <a:scrgbClr r="0" g="0" b="0"/>
+          </a:lnRef>
+          <a:fillRef idx="0">
+            <a:scrgbClr r="0" g="0" b="0"/>
+          </a:fillRef>
+          <a:effectRef idx="0">
+            <a:scrgbClr r="0" g="0" b="0"/>
+          </a:effectRef>
           <a:fontRef idx="minor"/>
         </p:style>
         <p:txBody>
           <a:bodyPr lIns="90000" tIns="45000" rIns="90000" bIns="45000" anchor="t">
             <a:spAutoFit/>
           </a:bodyPr>
+          <a:lstStyle/>
           <a:p>
             <a:pPr marL="285840" indent="-285840">
               <a:lnSpc>
@@ -4595,7 +4720,7 @@
           <p:nvPr/>
         </p:nvPicPr>
         <p:blipFill>
-          <a:blip r:embed="rId1"/>
+          <a:blip r:embed="rId2"/>
           <a:stretch/>
         </p:blipFill>
         <p:spPr>
@@ -4633,6 +4758,7 @@
         </p:spPr>
         <p:txBody>
           <a:bodyPr lIns="0" tIns="0" rIns="0" bIns="0" anchor="t"/>
+          <a:lstStyle/>
           <a:p>
             <a:pPr algn="ctr">
               <a:buNone/>
@@ -4658,7 +4784,7 @@
           <p:nvPr/>
         </p:nvPicPr>
         <p:blipFill>
-          <a:blip r:embed="rId2"/>
+          <a:blip r:embed="rId3"/>
           <a:stretch/>
         </p:blipFill>
         <p:spPr>
@@ -4696,6 +4822,7 @@
         </p:spPr>
         <p:txBody>
           <a:bodyPr lIns="0" tIns="0" rIns="0" bIns="0" anchor="t"/>
+          <a:lstStyle/>
           <a:p>
             <a:pPr algn="ctr">
               <a:buNone/>
@@ -4716,19 +4843,14 @@
       </p:sp>
     </p:spTree>
   </p:cSld>
-  <mc:AlternateContent>
-    <mc:Choice Requires="p14">
-      <p:transition spd="slow" p14:dur="2000"/>
-    </mc:Choice>
-    <mc:Fallback>
-      <p:transition spd="slow"/>
-    </mc:Fallback>
-  </mc:AlternateContent>
+  <p:clrMapOvr>
+    <a:masterClrMapping/>
+  </p:clrMapOvr>
 </p:sld>
 </file>
 
 <file path=ppt/slides/slide2.xml><?xml version="1.0" encoding="utf-8"?>
-<p:sld xmlns:a="http://schemas.openxmlformats.org/drawingml/2006/main" xmlns:p="http://schemas.openxmlformats.org/presentationml/2006/main" xmlns:r="http://schemas.openxmlformats.org/officeDocument/2006/relationships" xmlns:p14="http://schemas.microsoft.com/office/powerpoint/2010/main" xmlns:p15="http://schemas.microsoft.com/office/powerpoint/2012/main" xmlns:mc="http://schemas.openxmlformats.org/markup-compatibility/2006">
+<p:sld xmlns:a="http://schemas.openxmlformats.org/drawingml/2006/main" xmlns:r="http://schemas.openxmlformats.org/officeDocument/2006/relationships" xmlns:p="http://schemas.openxmlformats.org/presentationml/2006/main">
   <p:cSld>
     <p:spTree>
       <p:nvGrpSpPr>
@@ -4771,6 +4893,7 @@
           <a:bodyPr lIns="0" tIns="140400" rIns="0" bIns="0" anchor="t">
             <a:spAutoFit/>
           </a:bodyPr>
+          <a:lstStyle/>
           <a:p>
             <a:pPr marL="12600" indent="0" algn="ctr">
               <a:lnSpc>
@@ -4785,7 +4908,7 @@
               </a:tabLst>
             </a:pPr>
             <a:r>
-              <a:rPr lang="en-GB" sz="2800" b="0" u="none" spc="-156" strike="noStrike">
+              <a:rPr lang="en-GB" sz="2800" b="0" u="none" strike="noStrike" spc="-156">
                 <a:solidFill>
                   <a:srgbClr val="EF6952"/>
                 </a:solidFill>
@@ -4796,7 +4919,7 @@
               <a:t>US</a:t>
             </a:r>
             <a:r>
-              <a:rPr lang="en-GB" sz="2800" b="0" u="none" spc="-556" strike="noStrike">
+              <a:rPr lang="en-GB" sz="2800" b="0" u="none" strike="noStrike" spc="-556">
                 <a:solidFill>
                   <a:srgbClr val="EF6952"/>
                 </a:solidFill>
@@ -4807,7 +4930,7 @@
               <a:t> </a:t>
             </a:r>
             <a:r>
-              <a:rPr lang="en-GB" sz="2800" b="0" u="none" spc="-26" strike="noStrike">
+              <a:rPr lang="en-GB" sz="2800" b="0" u="none" strike="noStrike" spc="-26">
                 <a:solidFill>
                   <a:srgbClr val="EF6952"/>
                 </a:solidFill>
@@ -4818,7 +4941,7 @@
               <a:t>1</a:t>
             </a:r>
             <a:r>
-              <a:rPr lang="en-GB" sz="2800" b="0" u="none" spc="-490" strike="noStrike">
+              <a:rPr lang="en-GB" sz="2800" b="0" u="none" strike="noStrike" spc="-490">
                 <a:solidFill>
                   <a:srgbClr val="EF6952"/>
                 </a:solidFill>
@@ -4840,7 +4963,7 @@
               <a:t>:</a:t>
             </a:r>
             <a:r>
-              <a:rPr lang="en-GB" sz="2800" b="0" u="none" spc="-380" strike="noStrike">
+              <a:rPr lang="en-GB" sz="2800" b="0" u="none" strike="noStrike" spc="-380">
                 <a:solidFill>
                   <a:srgbClr val="EF6952"/>
                 </a:solidFill>
@@ -4862,7 +4985,7 @@
               <a:t>Mise</a:t>
             </a:r>
             <a:r>
-              <a:rPr lang="en-GB" sz="2800" b="0" u="none" spc="-130" strike="noStrike">
+              <a:rPr lang="en-GB" sz="2800" b="0" u="none" strike="noStrike" spc="-130">
                 <a:solidFill>
                   <a:srgbClr val="EF6952"/>
                 </a:solidFill>
@@ -4884,7 +5007,7 @@
               <a:t>en</a:t>
             </a:r>
             <a:r>
-              <a:rPr lang="en-GB" sz="2800" b="0" u="none" spc="-65" strike="noStrike">
+              <a:rPr lang="en-GB" sz="2800" b="0" u="none" strike="noStrike" spc="-65">
                 <a:solidFill>
                   <a:srgbClr val="EF6952"/>
                 </a:solidFill>
@@ -4906,7 +5029,7 @@
               <a:t>place</a:t>
             </a:r>
             <a:r>
-              <a:rPr lang="en-GB" sz="2800" b="0" u="none" spc="-51" strike="noStrike">
+              <a:rPr lang="en-GB" sz="2800" b="0" u="none" strike="noStrike" spc="-51">
                 <a:solidFill>
                   <a:srgbClr val="EF6952"/>
                 </a:solidFill>
@@ -4928,7 +5051,7 @@
               <a:t>d’un</a:t>
             </a:r>
             <a:r>
-              <a:rPr lang="en-GB" sz="2800" b="0" u="none" spc="-45" strike="noStrike">
+              <a:rPr lang="en-GB" sz="2800" b="0" u="none" strike="noStrike" spc="-45">
                 <a:solidFill>
                   <a:srgbClr val="EF6952"/>
                 </a:solidFill>
@@ -4950,7 +5073,7 @@
               <a:t>environnement</a:t>
             </a:r>
             <a:r>
-              <a:rPr lang="en-GB" sz="2800" b="0" u="none" spc="-45" strike="noStrike">
+              <a:rPr lang="en-GB" sz="2800" b="0" u="none" strike="noStrike" spc="-45">
                 <a:solidFill>
                   <a:srgbClr val="EF6952"/>
                 </a:solidFill>
@@ -4961,7 +5084,7 @@
               <a:t> </a:t>
             </a:r>
             <a:r>
-              <a:rPr lang="en-GB" sz="2800" b="0" u="none" spc="-11" strike="noStrike">
+              <a:rPr lang="en-GB" sz="2800" b="0" u="none" strike="noStrike" spc="-11">
                 <a:solidFill>
                   <a:srgbClr val="EF6952"/>
                 </a:solidFill>
@@ -5002,15 +5125,22 @@
           </a:ln>
         </p:spPr>
         <p:style>
-          <a:lnRef idx="0"/>
-          <a:fillRef idx="0"/>
-          <a:effectRef idx="0"/>
+          <a:lnRef idx="0">
+            <a:scrgbClr r="0" g="0" b="0"/>
+          </a:lnRef>
+          <a:fillRef idx="0">
+            <a:scrgbClr r="0" g="0" b="0"/>
+          </a:fillRef>
+          <a:effectRef idx="0">
+            <a:scrgbClr r="0" g="0" b="0"/>
+          </a:effectRef>
           <a:fontRef idx="minor"/>
         </p:style>
         <p:txBody>
           <a:bodyPr lIns="90000" tIns="45000" rIns="90000" bIns="45000" anchor="t">
             <a:spAutoFit/>
           </a:bodyPr>
+          <a:lstStyle/>
           <a:p>
             <a:pPr marL="285840" indent="-285840">
               <a:lnSpc>
@@ -5173,7 +5303,7 @@
           <p:nvPr/>
         </p:nvPicPr>
         <p:blipFill>
-          <a:blip r:embed="rId1"/>
+          <a:blip r:embed="rId2"/>
           <a:stretch/>
         </p:blipFill>
         <p:spPr>
@@ -5192,19 +5322,14 @@
       </p:pic>
     </p:spTree>
   </p:cSld>
-  <mc:AlternateContent>
-    <mc:Choice Requires="p14">
-      <p:transition spd="slow" p14:dur="2000"/>
-    </mc:Choice>
-    <mc:Fallback>
-      <p:transition spd="slow"/>
-    </mc:Fallback>
-  </mc:AlternateContent>
+  <p:clrMapOvr>
+    <a:masterClrMapping/>
+  </p:clrMapOvr>
 </p:sld>
 </file>
 
 <file path=ppt/slides/slide3.xml><?xml version="1.0" encoding="utf-8"?>
-<p:sld xmlns:a="http://schemas.openxmlformats.org/drawingml/2006/main" xmlns:p="http://schemas.openxmlformats.org/presentationml/2006/main" xmlns:r="http://schemas.openxmlformats.org/officeDocument/2006/relationships" xmlns:p14="http://schemas.microsoft.com/office/powerpoint/2010/main" xmlns:p15="http://schemas.microsoft.com/office/powerpoint/2012/main" xmlns:mc="http://schemas.openxmlformats.org/markup-compatibility/2006">
+<p:sld xmlns:a="http://schemas.openxmlformats.org/drawingml/2006/main" xmlns:r="http://schemas.openxmlformats.org/officeDocument/2006/relationships" xmlns:p="http://schemas.openxmlformats.org/presentationml/2006/main">
   <p:cSld>
     <p:spTree>
       <p:nvGrpSpPr>
@@ -5247,6 +5372,7 @@
           <a:bodyPr lIns="0" tIns="140400" rIns="0" bIns="0" anchor="t">
             <a:spAutoFit/>
           </a:bodyPr>
+          <a:lstStyle/>
           <a:p>
             <a:pPr marL="12600" indent="0" algn="ctr">
               <a:lnSpc>
@@ -5261,7 +5387,7 @@
               </a:tabLst>
             </a:pPr>
             <a:r>
-              <a:rPr lang="en-GB" sz="2800" b="0" u="none" spc="-156" strike="noStrike">
+              <a:rPr lang="en-GB" sz="2800" b="0" u="none" strike="noStrike" spc="-156">
                 <a:solidFill>
                   <a:srgbClr val="EF6952"/>
                 </a:solidFill>
@@ -5272,7 +5398,7 @@
               <a:t>US</a:t>
             </a:r>
             <a:r>
-              <a:rPr lang="en-GB" sz="2800" b="0" u="none" spc="-556" strike="noStrike">
+              <a:rPr lang="en-GB" sz="2800" b="0" u="none" strike="noStrike" spc="-556">
                 <a:solidFill>
                   <a:srgbClr val="EF6952"/>
                 </a:solidFill>
@@ -5283,7 +5409,7 @@
               <a:t> </a:t>
             </a:r>
             <a:r>
-              <a:rPr lang="en-GB" sz="2800" b="0" u="none" spc="-26" strike="noStrike">
+              <a:rPr lang="en-GB" sz="2800" b="0" u="none" strike="noStrike" spc="-26">
                 <a:solidFill>
                   <a:srgbClr val="EF6952"/>
                 </a:solidFill>
@@ -5294,7 +5420,7 @@
               <a:t>2</a:t>
             </a:r>
             <a:r>
-              <a:rPr lang="en-GB" sz="2800" b="0" u="none" spc="-490" strike="noStrike">
+              <a:rPr lang="en-GB" sz="2800" b="0" u="none" strike="noStrike" spc="-490">
                 <a:solidFill>
                   <a:srgbClr val="EF6952"/>
                 </a:solidFill>
@@ -5305,7 +5431,7 @@
               <a:t> </a:t>
             </a:r>
             <a:r>
-              <a:rPr lang="fr-FR" sz="2800" b="0" u="none" spc="-490" strike="noStrike">
+              <a:rPr lang="fr-FR" sz="2800" b="0" u="none" strike="noStrike" spc="-490">
                 <a:solidFill>
                   <a:srgbClr val="EF6952"/>
                 </a:solidFill>
@@ -5327,7 +5453,7 @@
               <a:t>:</a:t>
             </a:r>
             <a:r>
-              <a:rPr lang="fr-FR" sz="2800" b="0" u="none" spc="-380" strike="noStrike">
+              <a:rPr lang="fr-FR" sz="2800" b="0" u="none" strike="noStrike" spc="-380">
                 <a:solidFill>
                   <a:srgbClr val="EF6952"/>
                 </a:solidFill>
@@ -5349,7 +5475,7 @@
               <a:t>Vérification</a:t>
             </a:r>
             <a:r>
-              <a:rPr lang="fr-FR" sz="2800" b="0" u="none" spc="-96" strike="noStrike">
+              <a:rPr lang="fr-FR" sz="2800" b="0" u="none" strike="noStrike" spc="-96">
                 <a:solidFill>
                   <a:srgbClr val="EF6952"/>
                 </a:solidFill>
@@ -5371,7 +5497,7 @@
               <a:t>de</a:t>
             </a:r>
             <a:r>
-              <a:rPr lang="fr-FR" sz="2800" b="0" u="none" spc="-34" strike="noStrike">
+              <a:rPr lang="fr-FR" sz="2800" b="0" u="none" strike="noStrike" spc="-34">
                 <a:solidFill>
                   <a:srgbClr val="EF6952"/>
                 </a:solidFill>
@@ -5393,7 +5519,7 @@
               <a:t>la</a:t>
             </a:r>
             <a:r>
-              <a:rPr lang="fr-FR" sz="2800" b="0" u="none" spc="-40" strike="noStrike">
+              <a:rPr lang="fr-FR" sz="2800" b="0" u="none" strike="noStrike" spc="-40">
                 <a:solidFill>
                   <a:srgbClr val="EF6952"/>
                 </a:solidFill>
@@ -5404,7 +5530,7 @@
               <a:t> </a:t>
             </a:r>
             <a:r>
-              <a:rPr lang="fr-FR" sz="2800" b="0" u="none" spc="-11" strike="noStrike">
+              <a:rPr lang="fr-FR" sz="2800" b="0" u="none" strike="noStrike" spc="-11">
                 <a:solidFill>
                   <a:srgbClr val="EF6952"/>
                 </a:solidFill>
@@ -5445,15 +5571,22 @@
           </a:ln>
         </p:spPr>
         <p:style>
-          <a:lnRef idx="0"/>
-          <a:fillRef idx="0"/>
-          <a:effectRef idx="0"/>
+          <a:lnRef idx="0">
+            <a:scrgbClr r="0" g="0" b="0"/>
+          </a:lnRef>
+          <a:fillRef idx="0">
+            <a:scrgbClr r="0" g="0" b="0"/>
+          </a:fillRef>
+          <a:effectRef idx="0">
+            <a:scrgbClr r="0" g="0" b="0"/>
+          </a:effectRef>
           <a:fontRef idx="minor"/>
         </p:style>
         <p:txBody>
           <a:bodyPr lIns="90000" tIns="45000" rIns="90000" bIns="45000" anchor="t">
             <a:spAutoFit/>
           </a:bodyPr>
+          <a:lstStyle/>
           <a:p>
             <a:pPr marL="285840" indent="-285840">
               <a:lnSpc>
@@ -5555,7 +5688,7 @@
           <p:nvPr/>
         </p:nvPicPr>
         <p:blipFill>
-          <a:blip r:embed="rId1"/>
+          <a:blip r:embed="rId2"/>
           <a:stretch/>
         </p:blipFill>
         <p:spPr>
@@ -5579,7 +5712,7 @@
           <p:nvPr/>
         </p:nvPicPr>
         <p:blipFill>
-          <a:blip r:embed="rId2"/>
+          <a:blip r:embed="rId3"/>
           <a:stretch/>
         </p:blipFill>
         <p:spPr>
@@ -5598,19 +5731,14 @@
       </p:pic>
     </p:spTree>
   </p:cSld>
-  <mc:AlternateContent>
-    <mc:Choice Requires="p14">
-      <p:transition spd="slow" p14:dur="2000"/>
-    </mc:Choice>
-    <mc:Fallback>
-      <p:transition spd="slow"/>
-    </mc:Fallback>
-  </mc:AlternateContent>
+  <p:clrMapOvr>
+    <a:masterClrMapping/>
+  </p:clrMapOvr>
 </p:sld>
 </file>
 
 <file path=ppt/slides/slide4.xml><?xml version="1.0" encoding="utf-8"?>
-<p:sld xmlns:a="http://schemas.openxmlformats.org/drawingml/2006/main" xmlns:p="http://schemas.openxmlformats.org/presentationml/2006/main" xmlns:r="http://schemas.openxmlformats.org/officeDocument/2006/relationships" xmlns:p14="http://schemas.microsoft.com/office/powerpoint/2010/main" xmlns:p15="http://schemas.microsoft.com/office/powerpoint/2012/main" xmlns:mc="http://schemas.openxmlformats.org/markup-compatibility/2006">
+<p:sld xmlns:a="http://schemas.openxmlformats.org/drawingml/2006/main" xmlns:r="http://schemas.openxmlformats.org/officeDocument/2006/relationships" xmlns:p="http://schemas.openxmlformats.org/presentationml/2006/main">
   <p:cSld>
     <p:spTree>
       <p:nvGrpSpPr>
@@ -5653,6 +5781,7 @@
           <a:bodyPr lIns="0" tIns="140400" rIns="0" bIns="0" anchor="t">
             <a:spAutoFit/>
           </a:bodyPr>
+          <a:lstStyle/>
           <a:p>
             <a:pPr marL="12600" indent="0" algn="ctr">
               <a:lnSpc>
@@ -5708,15 +5837,22 @@
           </a:ln>
         </p:spPr>
         <p:style>
-          <a:lnRef idx="0"/>
-          <a:fillRef idx="0"/>
-          <a:effectRef idx="0"/>
+          <a:lnRef idx="0">
+            <a:scrgbClr r="0" g="0" b="0"/>
+          </a:lnRef>
+          <a:fillRef idx="0">
+            <a:scrgbClr r="0" g="0" b="0"/>
+          </a:fillRef>
+          <a:effectRef idx="0">
+            <a:scrgbClr r="0" g="0" b="0"/>
+          </a:effectRef>
           <a:fontRef idx="minor"/>
         </p:style>
         <p:txBody>
           <a:bodyPr lIns="90000" tIns="45000" rIns="90000" bIns="45000" anchor="t">
             <a:spAutoFit/>
           </a:bodyPr>
+          <a:lstStyle/>
           <a:p>
             <a:pPr marL="285840" indent="-285840">
               <a:lnSpc>
@@ -5844,19 +5980,14 @@
       </p:sp>
     </p:spTree>
   </p:cSld>
-  <mc:AlternateContent>
-    <mc:Choice Requires="p14">
-      <p:transition spd="slow" p14:dur="2000"/>
-    </mc:Choice>
-    <mc:Fallback>
-      <p:transition spd="slow"/>
-    </mc:Fallback>
-  </mc:AlternateContent>
+  <p:clrMapOvr>
+    <a:masterClrMapping/>
+  </p:clrMapOvr>
 </p:sld>
 </file>
 
 <file path=ppt/slides/slide5.xml><?xml version="1.0" encoding="utf-8"?>
-<p:sld xmlns:a="http://schemas.openxmlformats.org/drawingml/2006/main" xmlns:p="http://schemas.openxmlformats.org/presentationml/2006/main" xmlns:r="http://schemas.openxmlformats.org/officeDocument/2006/relationships" xmlns:p14="http://schemas.microsoft.com/office/powerpoint/2010/main" xmlns:p15="http://schemas.microsoft.com/office/powerpoint/2012/main" xmlns:mc="http://schemas.openxmlformats.org/markup-compatibility/2006">
+<p:sld xmlns:a="http://schemas.openxmlformats.org/drawingml/2006/main" xmlns:r="http://schemas.openxmlformats.org/officeDocument/2006/relationships" xmlns:p="http://schemas.openxmlformats.org/presentationml/2006/main">
   <p:cSld>
     <p:spTree>
       <p:nvGrpSpPr>
@@ -5899,6 +6030,7 @@
           <a:bodyPr lIns="0" tIns="140400" rIns="0" bIns="0" anchor="t">
             <a:spAutoFit/>
           </a:bodyPr>
+          <a:lstStyle/>
           <a:p>
             <a:pPr marL="12600" indent="0" algn="ctr">
               <a:lnSpc>
@@ -5954,15 +6086,22 @@
           </a:ln>
         </p:spPr>
         <p:style>
-          <a:lnRef idx="0"/>
-          <a:fillRef idx="0"/>
-          <a:effectRef idx="0"/>
+          <a:lnRef idx="0">
+            <a:scrgbClr r="0" g="0" b="0"/>
+          </a:lnRef>
+          <a:fillRef idx="0">
+            <a:scrgbClr r="0" g="0" b="0"/>
+          </a:fillRef>
+          <a:effectRef idx="0">
+            <a:scrgbClr r="0" g="0" b="0"/>
+          </a:effectRef>
           <a:fontRef idx="minor"/>
         </p:style>
         <p:txBody>
           <a:bodyPr lIns="90000" tIns="45000" rIns="90000" bIns="45000" anchor="t">
             <a:spAutoFit/>
           </a:bodyPr>
+          <a:lstStyle/>
           <a:p>
             <a:pPr marL="285840" indent="-285840">
               <a:lnSpc>
@@ -6109,8 +6248,8 @@
           <p:nvPr/>
         </p:nvPicPr>
         <p:blipFill>
-          <a:blip r:embed="rId1"/>
-          <a:srcRect l="0" t="0" r="49163" b="0"/>
+          <a:blip r:embed="rId2"/>
+          <a:srcRect r="49163"/>
           <a:stretch/>
         </p:blipFill>
         <p:spPr>
@@ -6129,19 +6268,14 @@
       </p:pic>
     </p:spTree>
   </p:cSld>
-  <mc:AlternateContent>
-    <mc:Choice Requires="p14">
-      <p:transition spd="slow" p14:dur="2000"/>
-    </mc:Choice>
-    <mc:Fallback>
-      <p:transition spd="slow"/>
-    </mc:Fallback>
-  </mc:AlternateContent>
+  <p:clrMapOvr>
+    <a:masterClrMapping/>
+  </p:clrMapOvr>
 </p:sld>
 </file>
 
 <file path=ppt/slides/slide6.xml><?xml version="1.0" encoding="utf-8"?>
-<p:sld xmlns:a="http://schemas.openxmlformats.org/drawingml/2006/main" xmlns:p="http://schemas.openxmlformats.org/presentationml/2006/main" xmlns:r="http://schemas.openxmlformats.org/officeDocument/2006/relationships" xmlns:p14="http://schemas.microsoft.com/office/powerpoint/2010/main" xmlns:p15="http://schemas.microsoft.com/office/powerpoint/2012/main" xmlns:mc="http://schemas.openxmlformats.org/markup-compatibility/2006">
+<p:sld xmlns:a="http://schemas.openxmlformats.org/drawingml/2006/main" xmlns:r="http://schemas.openxmlformats.org/officeDocument/2006/relationships" xmlns:p="http://schemas.openxmlformats.org/presentationml/2006/main">
   <p:cSld>
     <p:spTree>
       <p:nvGrpSpPr>
@@ -6184,6 +6318,7 @@
           <a:bodyPr lIns="0" tIns="140400" rIns="0" bIns="0" anchor="t">
             <a:spAutoFit/>
           </a:bodyPr>
+          <a:lstStyle/>
           <a:p>
             <a:pPr marL="12600" indent="0" algn="ctr">
               <a:lnSpc>
@@ -6221,7 +6356,7 @@
       </p:sp>
       <p:sp>
         <p:nvSpPr>
-          <p:cNvPr id="46" name=""/>
+          <p:cNvPr id="46" name="Rectangle 45"/>
           <p:cNvSpPr/>
           <p:nvPr/>
         </p:nvSpPr>
@@ -6239,15 +6374,22 @@
           </a:ln>
         </p:spPr>
         <p:style>
-          <a:lnRef idx="0"/>
-          <a:fillRef idx="0"/>
-          <a:effectRef idx="0"/>
+          <a:lnRef idx="0">
+            <a:scrgbClr r="0" g="0" b="0"/>
+          </a:lnRef>
+          <a:fillRef idx="0">
+            <a:scrgbClr r="0" g="0" b="0"/>
+          </a:fillRef>
+          <a:effectRef idx="0">
+            <a:scrgbClr r="0" g="0" b="0"/>
+          </a:effectRef>
           <a:fontRef idx="minor"/>
         </p:style>
         <p:txBody>
           <a:bodyPr lIns="90000" tIns="45000" rIns="90000" bIns="45000" anchor="t">
             <a:spAutoFit/>
           </a:bodyPr>
+          <a:lstStyle/>
           <a:p>
             <a:pPr marL="216000" indent="-216000">
               <a:lnSpc>
@@ -6540,12 +6682,12 @@
       </p:sp>
       <p:pic>
         <p:nvPicPr>
-          <p:cNvPr id="47" name=""/>
+          <p:cNvPr id="47" name="Image 46"/>
           <p:cNvPicPr/>
           <p:nvPr/>
         </p:nvPicPr>
         <p:blipFill>
-          <a:blip r:embed="rId1"/>
+          <a:blip r:embed="rId2"/>
           <a:stretch/>
         </p:blipFill>
         <p:spPr>
@@ -6564,19 +6706,14 @@
       </p:pic>
     </p:spTree>
   </p:cSld>
-  <mc:AlternateContent>
-    <mc:Choice Requires="p14">
-      <p:transition spd="slow" p14:dur="2000"/>
-    </mc:Choice>
-    <mc:Fallback>
-      <p:transition spd="slow"/>
-    </mc:Fallback>
-  </mc:AlternateContent>
+  <p:clrMapOvr>
+    <a:masterClrMapping/>
+  </p:clrMapOvr>
 </p:sld>
 </file>
 
 <file path=ppt/slides/slide7.xml><?xml version="1.0" encoding="utf-8"?>
-<p:sld xmlns:a="http://schemas.openxmlformats.org/drawingml/2006/main" xmlns:p="http://schemas.openxmlformats.org/presentationml/2006/main" xmlns:r="http://schemas.openxmlformats.org/officeDocument/2006/relationships" xmlns:p14="http://schemas.microsoft.com/office/powerpoint/2010/main" xmlns:p15="http://schemas.microsoft.com/office/powerpoint/2012/main" xmlns:mc="http://schemas.openxmlformats.org/markup-compatibility/2006">
+<p:sld xmlns:a="http://schemas.openxmlformats.org/drawingml/2006/main" xmlns:r="http://schemas.openxmlformats.org/officeDocument/2006/relationships" xmlns:p="http://schemas.openxmlformats.org/presentationml/2006/main">
   <p:cSld>
     <p:spTree>
       <p:nvGrpSpPr>
@@ -6619,6 +6756,7 @@
           <a:bodyPr lIns="0" tIns="140400" rIns="0" bIns="0" anchor="t">
             <a:spAutoFit/>
           </a:bodyPr>
+          <a:lstStyle/>
           <a:p>
             <a:pPr marL="12600" indent="0" algn="ctr">
               <a:lnSpc>
@@ -6674,15 +6812,22 @@
           </a:ln>
         </p:spPr>
         <p:style>
-          <a:lnRef idx="0"/>
-          <a:fillRef idx="0"/>
-          <a:effectRef idx="0"/>
+          <a:lnRef idx="0">
+            <a:scrgbClr r="0" g="0" b="0"/>
+          </a:lnRef>
+          <a:fillRef idx="0">
+            <a:scrgbClr r="0" g="0" b="0"/>
+          </a:fillRef>
+          <a:effectRef idx="0">
+            <a:scrgbClr r="0" g="0" b="0"/>
+          </a:effectRef>
           <a:fontRef idx="minor"/>
         </p:style>
         <p:txBody>
           <a:bodyPr lIns="90000" tIns="45000" rIns="90000" bIns="45000" anchor="t">
             <a:spAutoFit/>
           </a:bodyPr>
+          <a:lstStyle/>
           <a:p>
             <a:pPr marL="285840" indent="-285840">
               <a:lnSpc>
@@ -6795,12 +6940,12 @@
       </p:sp>
       <p:pic>
         <p:nvPicPr>
-          <p:cNvPr id="50" name=""/>
+          <p:cNvPr id="50" name="Image 49"/>
           <p:cNvPicPr/>
           <p:nvPr/>
         </p:nvPicPr>
         <p:blipFill>
-          <a:blip r:embed="rId1"/>
+          <a:blip r:embed="rId2"/>
           <a:stretch/>
         </p:blipFill>
         <p:spPr>
@@ -6819,12 +6964,12 @@
       </p:pic>
       <p:pic>
         <p:nvPicPr>
-          <p:cNvPr id="51" name=""/>
+          <p:cNvPr id="51" name="Image 50"/>
           <p:cNvPicPr/>
           <p:nvPr/>
         </p:nvPicPr>
         <p:blipFill>
-          <a:blip r:embed="rId2"/>
+          <a:blip r:embed="rId3"/>
           <a:stretch/>
         </p:blipFill>
         <p:spPr>
@@ -6843,19 +6988,14 @@
       </p:pic>
     </p:spTree>
   </p:cSld>
-  <mc:AlternateContent>
-    <mc:Choice Requires="p14">
-      <p:transition spd="slow" p14:dur="2000"/>
-    </mc:Choice>
-    <mc:Fallback>
-      <p:transition spd="slow"/>
-    </mc:Fallback>
-  </mc:AlternateContent>
+  <p:clrMapOvr>
+    <a:masterClrMapping/>
+  </p:clrMapOvr>
 </p:sld>
 </file>
 
 <file path=ppt/slides/slide8.xml><?xml version="1.0" encoding="utf-8"?>
-<p:sld xmlns:a="http://schemas.openxmlformats.org/drawingml/2006/main" xmlns:p="http://schemas.openxmlformats.org/presentationml/2006/main" xmlns:r="http://schemas.openxmlformats.org/officeDocument/2006/relationships" xmlns:p14="http://schemas.microsoft.com/office/powerpoint/2010/main" xmlns:p15="http://schemas.microsoft.com/office/powerpoint/2012/main" xmlns:mc="http://schemas.openxmlformats.org/markup-compatibility/2006">
+<p:sld xmlns:a="http://schemas.openxmlformats.org/drawingml/2006/main" xmlns:r="http://schemas.openxmlformats.org/officeDocument/2006/relationships" xmlns:p="http://schemas.openxmlformats.org/presentationml/2006/main">
   <p:cSld>
     <p:spTree>
       <p:nvGrpSpPr>
@@ -6898,6 +7038,7 @@
           <a:bodyPr lIns="0" tIns="140400" rIns="0" bIns="0" anchor="t">
             <a:spAutoFit/>
           </a:bodyPr>
+          <a:lstStyle/>
           <a:p>
             <a:pPr marL="12600" indent="0" algn="ctr">
               <a:lnSpc>
@@ -6953,15 +7094,22 @@
           </a:ln>
         </p:spPr>
         <p:style>
-          <a:lnRef idx="0"/>
-          <a:fillRef idx="0"/>
-          <a:effectRef idx="0"/>
+          <a:lnRef idx="0">
+            <a:scrgbClr r="0" g="0" b="0"/>
+          </a:lnRef>
+          <a:fillRef idx="0">
+            <a:scrgbClr r="0" g="0" b="0"/>
+          </a:fillRef>
+          <a:effectRef idx="0">
+            <a:scrgbClr r="0" g="0" b="0"/>
+          </a:effectRef>
           <a:fontRef idx="minor"/>
         </p:style>
         <p:txBody>
           <a:bodyPr lIns="90000" tIns="45000" rIns="90000" bIns="45000" anchor="t">
             <a:spAutoFit/>
           </a:bodyPr>
+          <a:lstStyle/>
           <a:p>
             <a:pPr marL="285840" indent="-285840">
               <a:lnSpc>
@@ -7184,7 +7332,7 @@
           <p:nvPr/>
         </p:nvPicPr>
         <p:blipFill>
-          <a:blip r:embed="rId1"/>
+          <a:blip r:embed="rId2"/>
           <a:stretch/>
         </p:blipFill>
         <p:spPr>
@@ -7208,7 +7356,7 @@
           <p:nvPr/>
         </p:nvPicPr>
         <p:blipFill>
-          <a:blip r:embed="rId2"/>
+          <a:blip r:embed="rId3"/>
           <a:stretch/>
         </p:blipFill>
         <p:spPr>
@@ -7246,6 +7394,7 @@
         </p:spPr>
         <p:txBody>
           <a:bodyPr lIns="0" tIns="0" rIns="0" bIns="0" anchor="t"/>
+          <a:lstStyle/>
           <a:p>
             <a:pPr algn="ctr">
               <a:buNone/>
@@ -7266,19 +7415,14 @@
       </p:sp>
     </p:spTree>
   </p:cSld>
-  <mc:AlternateContent>
-    <mc:Choice Requires="p14">
-      <p:transition spd="slow" p14:dur="2000"/>
-    </mc:Choice>
-    <mc:Fallback>
-      <p:transition spd="slow"/>
-    </mc:Fallback>
-  </mc:AlternateContent>
+  <p:clrMapOvr>
+    <a:masterClrMapping/>
+  </p:clrMapOvr>
 </p:sld>
 </file>
 
 <file path=ppt/slides/slide9.xml><?xml version="1.0" encoding="utf-8"?>
-<p:sld xmlns:a="http://schemas.openxmlformats.org/drawingml/2006/main" xmlns:p="http://schemas.openxmlformats.org/presentationml/2006/main" xmlns:r="http://schemas.openxmlformats.org/officeDocument/2006/relationships" xmlns:p14="http://schemas.microsoft.com/office/powerpoint/2010/main" xmlns:p15="http://schemas.microsoft.com/office/powerpoint/2012/main" xmlns:mc="http://schemas.openxmlformats.org/markup-compatibility/2006">
+<p:sld xmlns:a="http://schemas.openxmlformats.org/drawingml/2006/main" xmlns:r="http://schemas.openxmlformats.org/officeDocument/2006/relationships" xmlns:p="http://schemas.openxmlformats.org/presentationml/2006/main">
   <p:cSld>
     <p:spTree>
       <p:nvGrpSpPr>
@@ -7321,6 +7465,7 @@
           <a:bodyPr lIns="0" tIns="140400" rIns="0" bIns="0" anchor="t">
             <a:spAutoFit/>
           </a:bodyPr>
+          <a:lstStyle/>
           <a:p>
             <a:pPr marL="12600" indent="0" algn="ctr">
               <a:lnSpc>
@@ -7376,15 +7521,22 @@
           </a:ln>
         </p:spPr>
         <p:style>
-          <a:lnRef idx="0"/>
-          <a:fillRef idx="0"/>
-          <a:effectRef idx="0"/>
+          <a:lnRef idx="0">
+            <a:scrgbClr r="0" g="0" b="0"/>
+          </a:lnRef>
+          <a:fillRef idx="0">
+            <a:scrgbClr r="0" g="0" b="0"/>
+          </a:fillRef>
+          <a:effectRef idx="0">
+            <a:scrgbClr r="0" g="0" b="0"/>
+          </a:effectRef>
           <a:fontRef idx="minor"/>
         </p:style>
         <p:txBody>
           <a:bodyPr lIns="90000" tIns="45000" rIns="90000" bIns="45000" anchor="t">
             <a:spAutoFit/>
           </a:bodyPr>
+          <a:lstStyle/>
           <a:p>
             <a:pPr marL="285840" indent="-285840">
               <a:lnSpc>
@@ -7607,7 +7759,7 @@
           <p:nvPr/>
         </p:nvPicPr>
         <p:blipFill>
-          <a:blip r:embed="rId1"/>
+          <a:blip r:embed="rId2"/>
           <a:stretch/>
         </p:blipFill>
         <p:spPr>
@@ -7645,6 +7797,7 @@
         </p:spPr>
         <p:txBody>
           <a:bodyPr lIns="0" tIns="0" rIns="0" bIns="0" anchor="t"/>
+          <a:lstStyle/>
           <a:p>
             <a:pPr algn="ctr">
               <a:buNone/>
@@ -7665,19 +7818,14 @@
       </p:sp>
     </p:spTree>
   </p:cSld>
-  <mc:AlternateContent>
-    <mc:Choice Requires="p14">
-      <p:transition spd="slow" p14:dur="2000"/>
-    </mc:Choice>
-    <mc:Fallback>
-      <p:transition spd="slow"/>
-    </mc:Fallback>
-  </mc:AlternateContent>
+  <p:clrMapOvr>
+    <a:masterClrMapping/>
+  </p:clrMapOvr>
 </p:sld>
 </file>
 
 <file path=ppt/theme/theme1.xml><?xml version="1.0" encoding="utf-8"?>
-<a:theme xmlns:a="http://schemas.openxmlformats.org/drawingml/2006/main" xmlns:r="http://schemas.openxmlformats.org/officeDocument/2006/relationships" name="Office Theme">
+<a:theme xmlns:a="http://schemas.openxmlformats.org/drawingml/2006/main" name="Office Theme">
   <a:themeElements>
     <a:clrScheme name="Office">
       <a:dk1>
@@ -7719,12 +7867,12 @@
     </a:clrScheme>
     <a:fontScheme name="Office">
       <a:majorFont>
-        <a:latin typeface="Calibri" pitchFamily="0" charset="1"/>
+        <a:latin typeface="Calibri"/>
         <a:ea typeface=""/>
         <a:cs typeface=""/>
       </a:majorFont>
       <a:minorFont>
-        <a:latin typeface="Calibri" pitchFamily="0" charset="1"/>
+        <a:latin typeface="Calibri"/>
         <a:ea typeface=""/>
         <a:cs typeface=""/>
       </a:minorFont>
@@ -7753,7 +7901,7 @@
             </a:gs>
           </a:gsLst>
           <a:lin ang="16200000" scaled="1"/>
-          <a:tileRect l="0" t="0" r="0" b="0"/>
+          <a:tileRect/>
         </a:gradFill>
         <a:gradFill>
           <a:gsLst>
@@ -7774,7 +7922,7 @@
             </a:gs>
           </a:gsLst>
           <a:lin ang="16200000" scaled="0"/>
-          <a:tileRect l="0" t="0" r="0" b="0"/>
+          <a:tileRect/>
         </a:gradFill>
       </a:fillStyleLst>
       <a:lnStyleLst>
@@ -7825,7 +7973,7 @@
           <a:path path="circle">
             <a:fillToRect l="50000" t="-80000" r="50000" b="180000"/>
           </a:path>
-          <a:tileRect l="0" t="0" r="0" b="0"/>
+          <a:tileRect/>
         </a:gradFill>
         <a:gradFill>
           <a:gsLst>
@@ -7843,10 +7991,12 @@
           <a:path path="circle">
             <a:fillToRect l="50000" t="50000" r="50000" b="50000"/>
           </a:path>
-          <a:tileRect l="0" t="0" r="0" b="0"/>
+          <a:tileRect/>
         </a:gradFill>
       </a:bgFillStyleLst>
     </a:fmtScheme>
   </a:themeElements>
+  <a:objectDefaults/>
+  <a:extraClrSchemeLst/>
 </a:theme>
 </file>